--- a/output/20260731/slides/genre-scout.pptx
+++ b/output/20260731/slides/genre-scout.pptx
@@ -13,9 +13,10 @@
     <p:sldId id="261" r:id="rId7"/>
     <p:sldId id="262" r:id="rId8"/>
     <p:sldId id="263" r:id="rId9"/>
+    <p:sldId id="264" r:id="rId10"/>
   </p:sldIdLst>
   <p:notesMasterIdLst>
-    <p:notesMasterId r:id="rId10"/>
+    <p:notesMasterId r:id="rId11"/>
   </p:notesMasterIdLst>
   <p:sldSz cx="9144000" cy="5143500"/>
   <p:notesSz cx="5143500" cy="9144000"/>
@@ -1167,6 +1168,94 @@
 </p:notes>
 </file>
 
+<file path=ppt/notesSlides/notesSlide9.xml><?xml version="1.0" encoding="utf-8"?>
+<p:notes xmlns:a="http://schemas.openxmlformats.org/drawingml/2006/main" xmlns:r="http://schemas.openxmlformats.org/officeDocument/2006/relationships" xmlns:p="http://schemas.openxmlformats.org/presentationml/2006/main">
+  <p:cSld>
+    <p:spTree>
+      <p:nvGrpSpPr>
+        <p:cNvPr id="1" name=""/>
+        <p:cNvGrpSpPr/>
+        <p:nvPr/>
+      </p:nvGrpSpPr>
+      <p:grpSpPr>
+        <a:xfrm>
+          <a:off x="0" y="0"/>
+          <a:ext cx="0" cy="0"/>
+          <a:chOff x="0" y="0"/>
+          <a:chExt cx="0" cy="0"/>
+        </a:xfrm>
+      </p:grpSpPr>
+      <p:sp>
+        <p:nvSpPr>
+          <p:cNvPr id="2" name="Slide Image Placeholder 1"/>
+          <p:cNvSpPr>
+            <a:spLocks noGrp="1" noRot="1" noChangeAspect="1"/>
+          </p:cNvSpPr>
+          <p:nvPr>
+            <p:ph type="sldImg"/>
+          </p:nvPr>
+        </p:nvSpPr>
+        <p:spPr/>
+      </p:sp>
+      <p:sp>
+        <p:nvSpPr>
+          <p:cNvPr id="3" name="Notes Placeholder 2"/>
+          <p:cNvSpPr>
+            <a:spLocks noGrp="1"/>
+          </p:cNvSpPr>
+          <p:nvPr>
+            <p:ph type="body" idx="1"/>
+          </p:nvPr>
+        </p:nvSpPr>
+        <p:spPr/>
+        <p:txBody>
+          <a:bodyPr/>
+          <a:lstStyle/>
+          <a:p>
+            <a:r>
+              <a:rPr lang="en-US" dirty="0"/>
+              <a:t/>
+            </a:r>
+            <a:endParaRPr lang="en-US" dirty="0"/>
+          </a:p>
+        </p:txBody>
+      </p:sp>
+      <p:sp>
+        <p:nvSpPr>
+          <p:cNvPr id="4" name="Slide Number Placeholder 3"/>
+          <p:cNvSpPr>
+            <a:spLocks noGrp="1"/>
+          </p:cNvSpPr>
+          <p:nvPr>
+            <p:ph type="sldNum" sz="quarter" idx="10"/>
+          </p:nvPr>
+        </p:nvSpPr>
+        <p:spPr/>
+        <p:txBody>
+          <a:bodyPr/>
+          <a:lstStyle/>
+          <a:p>
+            <a:fld id="{F7021451-1387-4CA6-816F-3879F97B5CBC}" type="slidenum">
+              <a:rPr lang="en-US"/>
+              <a:t>9</a:t>
+            </a:fld>
+            <a:endParaRPr lang="en-US"/>
+          </a:p>
+        </p:txBody>
+      </p:sp>
+    </p:spTree>
+    <p:extLst>
+      <p:ext uri="{BB962C8B-B14F-4D97-AF65-F5344CB8AC3E}">
+        <p14:creationId xmlns:p14="http://schemas.microsoft.com/office/powerpoint/2010/main" val="1024086991"/>
+      </p:ext>
+    </p:extLst>
+  </p:cSld>
+  <p:clrMapOvr>
+    <a:masterClrMapping/>
+  </p:clrMapOvr>
+</p:notes>
+</file>
+
 <file path=ppt/slideLayouts/slideLayout1.xml><?xml version="1.0" encoding="utf-8"?>
 <p:sldLayout xmlns:a="http://schemas.openxmlformats.org/drawingml/2006/main" xmlns:r="http://schemas.openxmlformats.org/officeDocument/2006/relationships" xmlns:p="http://schemas.openxmlformats.org/presentationml/2006/main" preserve="1">
   <p:cSld name="DEFAULT">
@@ -1588,7 +1677,7 @@
                 <a:ea typeface="Noto Sans JP" pitchFamily="34" charset="-122"/>
                 <a:cs typeface="Noto Sans JP" pitchFamily="34" charset="-120"/>
               </a:rPr>
-              <a:t>サマリー（続き 1）</a:t>
+              <a:t>サマリー</a:t>
             </a:r>
             <a:endParaRPr lang="en-US" sz="2400" dirty="0"/>
           </a:p>
@@ -1603,7 +1692,7 @@
         <p:spPr>
           <a:xfrm>
             <a:off x="457200" y="1280160"/>
-            <a:ext cx="8229600" cy="3566160"/>
+            <a:ext cx="8229600" cy="3519785"/>
           </a:xfrm>
           <a:prstGeom prst="rect">
             <a:avLst/>
@@ -1711,7 +1800,7 @@
                 <a:ea typeface="Noto Sans JP" pitchFamily="34" charset="-122"/>
                 <a:cs typeface="Noto Sans JP" pitchFamily="34" charset="-120"/>
               </a:rPr>
-              <a:t>は視聴者関心度こそ高いが、新規参入の急成長事例が確認できず、かつ著作権（翻案権）上のグレーゾーンという他2ジャンルにはない固有リスクを抱えるため、3ジャンル中では優先度が最も低い。</a:t>
+              <a:t>は視聴者関心度こそ高いが、新規参入の急成長事例が確認できず、かつ著作権（翻案権）上のグレーゾーンという他2ジャンルにはない固有リスクを</a:t>
             </a:r>
             <a:endParaRPr lang="en-US" sz="1800" dirty="0"/>
           </a:p>
@@ -1775,848 +1864,51 @@
                 <a:ea typeface="Noto Sans JP" pitchFamily="34" charset="-122"/>
                 <a:cs typeface="Noto Sans JP" pitchFamily="34" charset="-120"/>
               </a:rPr>
-              <a:t>比較表（自宅完結・自動生成に向くジャンル）（続き 1）</a:t>
+              <a:t>サマリー（続き 1）</a:t>
             </a:r>
             <a:endParaRPr lang="en-US" sz="2400" dirty="0"/>
           </a:p>
         </p:txBody>
       </p:sp>
-      <p:graphicFrame>
-        <p:nvGraphicFramePr>
-          <p:cNvPr id="4" name="Table 0"/>
-          <p:cNvGraphicFramePr>
-            <a:graphicFrameLocks noGrp="1"/>
-          </p:cNvGraphicFramePr>
-          <p:nvPr>
-            <p:extLst>
-              <p:ext uri="{D42A27DB-BD31-4B8C-83A1-F6EECF244321}">
-                <p14:modId xmlns:p14="http://schemas.microsoft.com/office/powerpoint/2010/main" val="1579011935"/>
-              </p:ext>
-            </p:extLst>
-          </p:nvPr>
-        </p:nvGraphicFramePr>
-        <p:xfrm>
-          <a:off x="457200" y="1280160"/>
-          <a:ext cx="8229600" cy="914400"/>
-        </p:xfrm>
-        <a:graphic>
-          <a:graphicData uri="http://schemas.openxmlformats.org/drawingml/2006/table">
-            <a:tbl>
-              <a:tblPr/>
-              <a:tblGrid>
-                <a:gridCol w="508434"/>
-                <a:gridCol w="1078550"/>
-                <a:gridCol w="622701"/>
-                <a:gridCol w="843142"/>
-                <a:gridCol w="843142"/>
-                <a:gridCol w="4333632"/>
-              </a:tblGrid>
-              <a:tr h="878295">
-                <a:tc>
-                  <a:txBody>
-                    <a:bodyPr/>
-                    <a:lstStyle/>
-                    <a:p>
-                      <a:pPr algn="ctr" indent="0" marL="0">
-                        <a:buNone/>
-                      </a:pPr>
-                      <a:r>
-                        <a:rPr lang="en-US" sz="1400" b="1" dirty="0">
-                          <a:solidFill>
-                            <a:srgbClr val="FFFFFF"/>
-                          </a:solidFill>
-                          <a:latin typeface="Noto Sans JP" pitchFamily="34" charset="0"/>
-                          <a:ea typeface="Noto Sans JP" pitchFamily="34" charset="-122"/>
-                          <a:cs typeface="Noto Sans JP" pitchFamily="34" charset="-120"/>
-                        </a:rPr>
-                        <a:t>順位</a:t>
-                      </a:r>
-                      <a:endParaRPr lang="en-US" sz="1400" dirty="0">
-                        <a:latin typeface="Noto Sans JP" charset="0"/>
-                        <a:ea typeface="Noto Sans JP" charset="0"/>
-                        <a:cs typeface="Noto Sans JP" charset="0"/>
-                      </a:endParaRPr>
-                    </a:p>
-                  </a:txBody>
-                  <a:tcPr marL="91440" marR="91440" marT="45720" marB="45720" anchor="ctr">
-                    <a:lnL w="12700" cap="flat" cmpd="sng" algn="ctr">
-                      <a:solidFill>
-                        <a:srgbClr val="E5E7EB"/>
-                      </a:solidFill>
-                      <a:prstDash val="solid"/>
-                      <a:round/>
-                      <a:headEnd type="none" w="med" len="med"/>
-                      <a:tailEnd type="none" w="med" len="med"/>
-                    </a:lnL>
-                    <a:lnR w="12700" cap="flat" cmpd="sng" algn="ctr">
-                      <a:solidFill>
-                        <a:srgbClr val="E5E7EB"/>
-                      </a:solidFill>
-                      <a:prstDash val="solid"/>
-                      <a:round/>
-                      <a:headEnd type="none" w="med" len="med"/>
-                      <a:tailEnd type="none" w="med" len="med"/>
-                    </a:lnR>
-                    <a:lnT w="12700" cap="flat" cmpd="sng" algn="ctr">
-                      <a:solidFill>
-                        <a:srgbClr val="E5E7EB"/>
-                      </a:solidFill>
-                      <a:prstDash val="solid"/>
-                      <a:round/>
-                      <a:headEnd type="none" w="med" len="med"/>
-                      <a:tailEnd type="none" w="med" len="med"/>
-                    </a:lnT>
-                    <a:lnB w="12700" cap="flat" cmpd="sng" algn="ctr">
-                      <a:solidFill>
-                        <a:srgbClr val="E5E7EB"/>
-                      </a:solidFill>
-                      <a:prstDash val="solid"/>
-                      <a:round/>
-                      <a:headEnd type="none" w="med" len="med"/>
-                      <a:tailEnd type="none" w="med" len="med"/>
-                    </a:lnB>
-                    <a:solidFill>
-                      <a:srgbClr val="374151"/>
-                    </a:solidFill>
-                  </a:tcPr>
-                </a:tc>
-                <a:tc>
-                  <a:txBody>
-                    <a:bodyPr/>
-                    <a:lstStyle/>
-                    <a:p>
-                      <a:pPr algn="ctr" indent="0" marL="0">
-                        <a:buNone/>
-                      </a:pPr>
-                      <a:r>
-                        <a:rPr lang="en-US" sz="1400" b="1" dirty="0">
-                          <a:solidFill>
-                            <a:srgbClr val="FFFFFF"/>
-                          </a:solidFill>
-                          <a:latin typeface="Noto Sans JP" pitchFamily="34" charset="0"/>
-                          <a:ea typeface="Noto Sans JP" pitchFamily="34" charset="-122"/>
-                          <a:cs typeface="Noto Sans JP" pitchFamily="34" charset="-120"/>
-                        </a:rPr>
-                        <a:t>ジャンル</a:t>
-                      </a:r>
-                      <a:endParaRPr lang="en-US" sz="1400" dirty="0">
-                        <a:latin typeface="Noto Sans JP" charset="0"/>
-                        <a:ea typeface="Noto Sans JP" charset="0"/>
-                        <a:cs typeface="Noto Sans JP" charset="0"/>
-                      </a:endParaRPr>
-                    </a:p>
-                  </a:txBody>
-                  <a:tcPr marL="91440" marR="91440" marT="45720" marB="45720" anchor="ctr">
-                    <a:lnL w="12700" cap="flat" cmpd="sng" algn="ctr">
-                      <a:solidFill>
-                        <a:srgbClr val="E5E7EB"/>
-                      </a:solidFill>
-                      <a:prstDash val="solid"/>
-                      <a:round/>
-                      <a:headEnd type="none" w="med" len="med"/>
-                      <a:tailEnd type="none" w="med" len="med"/>
-                    </a:lnL>
-                    <a:lnR w="12700" cap="flat" cmpd="sng" algn="ctr">
-                      <a:solidFill>
-                        <a:srgbClr val="E5E7EB"/>
-                      </a:solidFill>
-                      <a:prstDash val="solid"/>
-                      <a:round/>
-                      <a:headEnd type="none" w="med" len="med"/>
-                      <a:tailEnd type="none" w="med" len="med"/>
-                    </a:lnR>
-                    <a:lnT w="12700" cap="flat" cmpd="sng" algn="ctr">
-                      <a:solidFill>
-                        <a:srgbClr val="E5E7EB"/>
-                      </a:solidFill>
-                      <a:prstDash val="solid"/>
-                      <a:round/>
-                      <a:headEnd type="none" w="med" len="med"/>
-                      <a:tailEnd type="none" w="med" len="med"/>
-                    </a:lnT>
-                    <a:lnB w="12700" cap="flat" cmpd="sng" algn="ctr">
-                      <a:solidFill>
-                        <a:srgbClr val="E5E7EB"/>
-                      </a:solidFill>
-                      <a:prstDash val="solid"/>
-                      <a:round/>
-                      <a:headEnd type="none" w="med" len="med"/>
-                      <a:tailEnd type="none" w="med" len="med"/>
-                    </a:lnB>
-                    <a:solidFill>
-                      <a:srgbClr val="374151"/>
-                    </a:solidFill>
-                  </a:tcPr>
-                </a:tc>
-                <a:tc>
-                  <a:txBody>
-                    <a:bodyPr/>
-                    <a:lstStyle/>
-                    <a:p>
-                      <a:pPr algn="ctr" indent="0" marL="0">
-                        <a:buNone/>
-                      </a:pPr>
-                      <a:r>
-                        <a:rPr lang="en-US" sz="1400" b="1" dirty="0">
-                          <a:solidFill>
-                            <a:srgbClr val="FFFFFF"/>
-                          </a:solidFill>
-                          <a:latin typeface="Noto Sans JP" pitchFamily="34" charset="0"/>
-                          <a:ea typeface="Noto Sans JP" pitchFamily="34" charset="-122"/>
-                          <a:cs typeface="Noto Sans JP" pitchFamily="34" charset="-120"/>
-                        </a:rPr>
-                        <a:t>視聴者関心度</a:t>
-                      </a:r>
-                      <a:endParaRPr lang="en-US" sz="1400" dirty="0">
-                        <a:latin typeface="Noto Sans JP" charset="0"/>
-                        <a:ea typeface="Noto Sans JP" charset="0"/>
-                        <a:cs typeface="Noto Sans JP" charset="0"/>
-                      </a:endParaRPr>
-                    </a:p>
-                  </a:txBody>
-                  <a:tcPr marL="91440" marR="91440" marT="45720" marB="45720" anchor="ctr">
-                    <a:lnL w="12700" cap="flat" cmpd="sng" algn="ctr">
-                      <a:solidFill>
-                        <a:srgbClr val="E5E7EB"/>
-                      </a:solidFill>
-                      <a:prstDash val="solid"/>
-                      <a:round/>
-                      <a:headEnd type="none" w="med" len="med"/>
-                      <a:tailEnd type="none" w="med" len="med"/>
-                    </a:lnL>
-                    <a:lnR w="12700" cap="flat" cmpd="sng" algn="ctr">
-                      <a:solidFill>
-                        <a:srgbClr val="E5E7EB"/>
-                      </a:solidFill>
-                      <a:prstDash val="solid"/>
-                      <a:round/>
-                      <a:headEnd type="none" w="med" len="med"/>
-                      <a:tailEnd type="none" w="med" len="med"/>
-                    </a:lnR>
-                    <a:lnT w="12700" cap="flat" cmpd="sng" algn="ctr">
-                      <a:solidFill>
-                        <a:srgbClr val="E5E7EB"/>
-                      </a:solidFill>
-                      <a:prstDash val="solid"/>
-                      <a:round/>
-                      <a:headEnd type="none" w="med" len="med"/>
-                      <a:tailEnd type="none" w="med" len="med"/>
-                    </a:lnT>
-                    <a:lnB w="12700" cap="flat" cmpd="sng" algn="ctr">
-                      <a:solidFill>
-                        <a:srgbClr val="E5E7EB"/>
-                      </a:solidFill>
-                      <a:prstDash val="solid"/>
-                      <a:round/>
-                      <a:headEnd type="none" w="med" len="med"/>
-                      <a:tailEnd type="none" w="med" len="med"/>
-                    </a:lnB>
-                    <a:solidFill>
-                      <a:srgbClr val="374151"/>
-                    </a:solidFill>
-                  </a:tcPr>
-                </a:tc>
-                <a:tc>
-                  <a:txBody>
-                    <a:bodyPr/>
-                    <a:lstStyle/>
-                    <a:p>
-                      <a:pPr algn="ctr" indent="0" marL="0">
-                        <a:buNone/>
-                      </a:pPr>
-                      <a:r>
-                        <a:rPr lang="en-US" sz="1400" b="1" dirty="0">
-                          <a:solidFill>
-                            <a:srgbClr val="FFFFFF"/>
-                          </a:solidFill>
-                          <a:latin typeface="Noto Sans JP" pitchFamily="34" charset="0"/>
-                          <a:ea typeface="Noto Sans JP" pitchFamily="34" charset="-122"/>
-                          <a:cs typeface="Noto Sans JP" pitchFamily="34" charset="-120"/>
-                        </a:rPr>
-                        <a:t>短期急成長ポテンシャル</a:t>
-                      </a:r>
-                      <a:endParaRPr lang="en-US" sz="1400" dirty="0">
-                        <a:latin typeface="Noto Sans JP" charset="0"/>
-                        <a:ea typeface="Noto Sans JP" charset="0"/>
-                        <a:cs typeface="Noto Sans JP" charset="0"/>
-                      </a:endParaRPr>
-                    </a:p>
-                  </a:txBody>
-                  <a:tcPr marL="91440" marR="91440" marT="45720" marB="45720" anchor="ctr">
-                    <a:lnL w="12700" cap="flat" cmpd="sng" algn="ctr">
-                      <a:solidFill>
-                        <a:srgbClr val="E5E7EB"/>
-                      </a:solidFill>
-                      <a:prstDash val="solid"/>
-                      <a:round/>
-                      <a:headEnd type="none" w="med" len="med"/>
-                      <a:tailEnd type="none" w="med" len="med"/>
-                    </a:lnL>
-                    <a:lnR w="12700" cap="flat" cmpd="sng" algn="ctr">
-                      <a:solidFill>
-                        <a:srgbClr val="E5E7EB"/>
-                      </a:solidFill>
-                      <a:prstDash val="solid"/>
-                      <a:round/>
-                      <a:headEnd type="none" w="med" len="med"/>
-                      <a:tailEnd type="none" w="med" len="med"/>
-                    </a:lnR>
-                    <a:lnT w="12700" cap="flat" cmpd="sng" algn="ctr">
-                      <a:solidFill>
-                        <a:srgbClr val="E5E7EB"/>
-                      </a:solidFill>
-                      <a:prstDash val="solid"/>
-                      <a:round/>
-                      <a:headEnd type="none" w="med" len="med"/>
-                      <a:tailEnd type="none" w="med" len="med"/>
-                    </a:lnT>
-                    <a:lnB w="12700" cap="flat" cmpd="sng" algn="ctr">
-                      <a:solidFill>
-                        <a:srgbClr val="E5E7EB"/>
-                      </a:solidFill>
-                      <a:prstDash val="solid"/>
-                      <a:round/>
-                      <a:headEnd type="none" w="med" len="med"/>
-                      <a:tailEnd type="none" w="med" len="med"/>
-                    </a:lnB>
-                    <a:solidFill>
-                      <a:srgbClr val="374151"/>
-                    </a:solidFill>
-                  </a:tcPr>
-                </a:tc>
-                <a:tc>
-                  <a:txBody>
-                    <a:bodyPr/>
-                    <a:lstStyle/>
-                    <a:p>
-                      <a:pPr algn="ctr" indent="0" marL="0">
-                        <a:buNone/>
-                      </a:pPr>
-                      <a:r>
-                        <a:rPr lang="en-US" sz="1400" b="1" dirty="0">
-                          <a:solidFill>
-                            <a:srgbClr val="FFFFFF"/>
-                          </a:solidFill>
-                          <a:latin typeface="Noto Sans JP" pitchFamily="34" charset="0"/>
-                          <a:ea typeface="Noto Sans JP" pitchFamily="34" charset="-122"/>
-                          <a:cs typeface="Noto Sans JP" pitchFamily="34" charset="-120"/>
-                        </a:rPr>
-                        <a:t>自宅完結・自動生成適性</a:t>
-                      </a:r>
-                      <a:endParaRPr lang="en-US" sz="1400" dirty="0">
-                        <a:latin typeface="Noto Sans JP" charset="0"/>
-                        <a:ea typeface="Noto Sans JP" charset="0"/>
-                        <a:cs typeface="Noto Sans JP" charset="0"/>
-                      </a:endParaRPr>
-                    </a:p>
-                  </a:txBody>
-                  <a:tcPr marL="91440" marR="91440" marT="45720" marB="45720" anchor="ctr">
-                    <a:lnL w="12700" cap="flat" cmpd="sng" algn="ctr">
-                      <a:solidFill>
-                        <a:srgbClr val="E5E7EB"/>
-                      </a:solidFill>
-                      <a:prstDash val="solid"/>
-                      <a:round/>
-                      <a:headEnd type="none" w="med" len="med"/>
-                      <a:tailEnd type="none" w="med" len="med"/>
-                    </a:lnL>
-                    <a:lnR w="12700" cap="flat" cmpd="sng" algn="ctr">
-                      <a:solidFill>
-                        <a:srgbClr val="E5E7EB"/>
-                      </a:solidFill>
-                      <a:prstDash val="solid"/>
-                      <a:round/>
-                      <a:headEnd type="none" w="med" len="med"/>
-                      <a:tailEnd type="none" w="med" len="med"/>
-                    </a:lnR>
-                    <a:lnT w="12700" cap="flat" cmpd="sng" algn="ctr">
-                      <a:solidFill>
-                        <a:srgbClr val="E5E7EB"/>
-                      </a:solidFill>
-                      <a:prstDash val="solid"/>
-                      <a:round/>
-                      <a:headEnd type="none" w="med" len="med"/>
-                      <a:tailEnd type="none" w="med" len="med"/>
-                    </a:lnT>
-                    <a:lnB w="12700" cap="flat" cmpd="sng" algn="ctr">
-                      <a:solidFill>
-                        <a:srgbClr val="E5E7EB"/>
-                      </a:solidFill>
-                      <a:prstDash val="solid"/>
-                      <a:round/>
-                      <a:headEnd type="none" w="med" len="med"/>
-                      <a:tailEnd type="none" w="med" len="med"/>
-                    </a:lnB>
-                    <a:solidFill>
-                      <a:srgbClr val="374151"/>
-                    </a:solidFill>
-                  </a:tcPr>
-                </a:tc>
-                <a:tc>
-                  <a:txBody>
-                    <a:bodyPr/>
-                    <a:lstStyle/>
-                    <a:p>
-                      <a:pPr algn="ctr" indent="0" marL="0">
-                        <a:buNone/>
-                      </a:pPr>
-                      <a:r>
-                        <a:rPr lang="en-US" sz="1400" b="1" dirty="0">
-                          <a:solidFill>
-                            <a:srgbClr val="FFFFFF"/>
-                          </a:solidFill>
-                          <a:latin typeface="Noto Sans JP" pitchFamily="34" charset="0"/>
-                          <a:ea typeface="Noto Sans JP" pitchFamily="34" charset="-122"/>
-                          <a:cs typeface="Noto Sans JP" pitchFamily="34" charset="-120"/>
-                        </a:rPr>
-                        <a:t>総合コメント</a:t>
-                      </a:r>
-                      <a:endParaRPr lang="en-US" sz="1400" dirty="0">
-                        <a:latin typeface="Noto Sans JP" charset="0"/>
-                        <a:ea typeface="Noto Sans JP" charset="0"/>
-                        <a:cs typeface="Noto Sans JP" charset="0"/>
-                      </a:endParaRPr>
-                    </a:p>
-                  </a:txBody>
-                  <a:tcPr marL="91440" marR="91440" marT="45720" marB="45720" anchor="ctr">
-                    <a:lnL w="12700" cap="flat" cmpd="sng" algn="ctr">
-                      <a:solidFill>
-                        <a:srgbClr val="E5E7EB"/>
-                      </a:solidFill>
-                      <a:prstDash val="solid"/>
-                      <a:round/>
-                      <a:headEnd type="none" w="med" len="med"/>
-                      <a:tailEnd type="none" w="med" len="med"/>
-                    </a:lnL>
-                    <a:lnR w="12700" cap="flat" cmpd="sng" algn="ctr">
-                      <a:solidFill>
-                        <a:srgbClr val="E5E7EB"/>
-                      </a:solidFill>
-                      <a:prstDash val="solid"/>
-                      <a:round/>
-                      <a:headEnd type="none" w="med" len="med"/>
-                      <a:tailEnd type="none" w="med" len="med"/>
-                    </a:lnR>
-                    <a:lnT w="12700" cap="flat" cmpd="sng" algn="ctr">
-                      <a:solidFill>
-                        <a:srgbClr val="E5E7EB"/>
-                      </a:solidFill>
-                      <a:prstDash val="solid"/>
-                      <a:round/>
-                      <a:headEnd type="none" w="med" len="med"/>
-                      <a:tailEnd type="none" w="med" len="med"/>
-                    </a:lnT>
-                    <a:lnB w="12700" cap="flat" cmpd="sng" algn="ctr">
-                      <a:solidFill>
-                        <a:srgbClr val="E5E7EB"/>
-                      </a:solidFill>
-                      <a:prstDash val="solid"/>
-                      <a:round/>
-                      <a:headEnd type="none" w="med" len="med"/>
-                      <a:tailEnd type="none" w="med" len="med"/>
-                    </a:lnB>
-                    <a:solidFill>
-                      <a:srgbClr val="374151"/>
-                    </a:solidFill>
-                  </a:tcPr>
-                </a:tc>
-              </a:tr>
-              <a:tr h="2642145">
-                <a:tc>
-                  <a:txBody>
-                    <a:bodyPr/>
-                    <a:lstStyle/>
-                    <a:p>
-                      <a:pPr indent="0" marL="0">
-                        <a:buNone/>
-                      </a:pPr>
-                      <a:r>
-                        <a:rPr lang="en-US" sz="1400" dirty="0">
-                          <a:solidFill>
-                            <a:srgbClr val="111827"/>
-                          </a:solidFill>
-                          <a:latin typeface="Noto Sans JP" pitchFamily="34" charset="0"/>
-                          <a:ea typeface="Noto Sans JP" pitchFamily="34" charset="-122"/>
-                          <a:cs typeface="Noto Sans JP" pitchFamily="34" charset="-120"/>
-                        </a:rPr>
-                        <a:t>1</a:t>
-                      </a:r>
-                      <a:endParaRPr lang="en-US" sz="1400" dirty="0">
-                        <a:latin typeface="Noto Sans JP" charset="0"/>
-                        <a:ea typeface="Noto Sans JP" charset="0"/>
-                        <a:cs typeface="Noto Sans JP" charset="0"/>
-                      </a:endParaRPr>
-                    </a:p>
-                  </a:txBody>
-                  <a:tcPr marL="91440" marR="91440" marT="45720" marB="45720" anchor="ctr">
-                    <a:lnL w="12700" cap="flat" cmpd="sng" algn="ctr">
-                      <a:solidFill>
-                        <a:srgbClr val="E5E7EB"/>
-                      </a:solidFill>
-                      <a:prstDash val="solid"/>
-                      <a:round/>
-                      <a:headEnd type="none" w="med" len="med"/>
-                      <a:tailEnd type="none" w="med" len="med"/>
-                    </a:lnL>
-                    <a:lnR w="12700" cap="flat" cmpd="sng" algn="ctr">
-                      <a:solidFill>
-                        <a:srgbClr val="E5E7EB"/>
-                      </a:solidFill>
-                      <a:prstDash val="solid"/>
-                      <a:round/>
-                      <a:headEnd type="none" w="med" len="med"/>
-                      <a:tailEnd type="none" w="med" len="med"/>
-                    </a:lnR>
-                    <a:lnT w="12700" cap="flat" cmpd="sng" algn="ctr">
-                      <a:solidFill>
-                        <a:srgbClr val="E5E7EB"/>
-                      </a:solidFill>
-                      <a:prstDash val="solid"/>
-                      <a:round/>
-                      <a:headEnd type="none" w="med" len="med"/>
-                      <a:tailEnd type="none" w="med" len="med"/>
-                    </a:lnT>
-                    <a:lnB w="12700" cap="flat" cmpd="sng" algn="ctr">
-                      <a:solidFill>
-                        <a:srgbClr val="E5E7EB"/>
-                      </a:solidFill>
-                      <a:prstDash val="solid"/>
-                      <a:round/>
-                      <a:headEnd type="none" w="med" len="med"/>
-                      <a:tailEnd type="none" w="med" len="med"/>
-                    </a:lnB>
-                  </a:tcPr>
-                </a:tc>
-                <a:tc>
-                  <a:txBody>
-                    <a:bodyPr/>
-                    <a:lstStyle/>
-                    <a:p>
-                      <a:pPr indent="0" marL="0">
-                        <a:buNone/>
-                      </a:pPr>
-                      <a:r>
-                        <a:rPr lang="en-US" sz="1400" dirty="0">
-                          <a:solidFill>
-                            <a:srgbClr val="111827"/>
-                          </a:solidFill>
-                          <a:latin typeface="Noto Sans JP" pitchFamily="34" charset="0"/>
-                          <a:ea typeface="Noto Sans JP" pitchFamily="34" charset="-122"/>
-                          <a:cs typeface="Noto Sans JP" pitchFamily="34" charset="-120"/>
-                        </a:rPr>
-                        <a:t>都市伝説・雑学解説</a:t>
-                      </a:r>
-                      <a:endParaRPr lang="en-US" sz="1400" dirty="0">
-                        <a:latin typeface="Noto Sans JP" charset="0"/>
-                        <a:ea typeface="Noto Sans JP" charset="0"/>
-                        <a:cs typeface="Noto Sans JP" charset="0"/>
-                      </a:endParaRPr>
-                    </a:p>
-                  </a:txBody>
-                  <a:tcPr marL="91440" marR="91440" marT="45720" marB="45720" anchor="ctr">
-                    <a:lnL w="12700" cap="flat" cmpd="sng" algn="ctr">
-                      <a:solidFill>
-                        <a:srgbClr val="E5E7EB"/>
-                      </a:solidFill>
-                      <a:prstDash val="solid"/>
-                      <a:round/>
-                      <a:headEnd type="none" w="med" len="med"/>
-                      <a:tailEnd type="none" w="med" len="med"/>
-                    </a:lnL>
-                    <a:lnR w="12700" cap="flat" cmpd="sng" algn="ctr">
-                      <a:solidFill>
-                        <a:srgbClr val="E5E7EB"/>
-                      </a:solidFill>
-                      <a:prstDash val="solid"/>
-                      <a:round/>
-                      <a:headEnd type="none" w="med" len="med"/>
-                      <a:tailEnd type="none" w="med" len="med"/>
-                    </a:lnR>
-                    <a:lnT w="12700" cap="flat" cmpd="sng" algn="ctr">
-                      <a:solidFill>
-                        <a:srgbClr val="E5E7EB"/>
-                      </a:solidFill>
-                      <a:prstDash val="solid"/>
-                      <a:round/>
-                      <a:headEnd type="none" w="med" len="med"/>
-                      <a:tailEnd type="none" w="med" len="med"/>
-                    </a:lnT>
-                    <a:lnB w="12700" cap="flat" cmpd="sng" algn="ctr">
-                      <a:solidFill>
-                        <a:srgbClr val="E5E7EB"/>
-                      </a:solidFill>
-                      <a:prstDash val="solid"/>
-                      <a:round/>
-                      <a:headEnd type="none" w="med" len="med"/>
-                      <a:tailEnd type="none" w="med" len="med"/>
-                    </a:lnB>
-                  </a:tcPr>
-                </a:tc>
-                <a:tc>
-                  <a:txBody>
-                    <a:bodyPr/>
-                    <a:lstStyle/>
-                    <a:p>
-                      <a:pPr indent="0" marL="0">
-                        <a:buNone/>
-                      </a:pPr>
-                      <a:r>
-                        <a:rPr lang="en-US" sz="1400" dirty="0">
-                          <a:solidFill>
-                            <a:srgbClr val="111827"/>
-                          </a:solidFill>
-                          <a:latin typeface="Noto Sans JP" pitchFamily="34" charset="0"/>
-                          <a:ea typeface="Noto Sans JP" pitchFamily="34" charset="-122"/>
-                          <a:cs typeface="Noto Sans JP" pitchFamily="34" charset="-120"/>
-                        </a:rPr>
-                        <a:t>5/5</a:t>
-                      </a:r>
-                      <a:endParaRPr lang="en-US" sz="1400" dirty="0">
-                        <a:latin typeface="Noto Sans JP" charset="0"/>
-                        <a:ea typeface="Noto Sans JP" charset="0"/>
-                        <a:cs typeface="Noto Sans JP" charset="0"/>
-                      </a:endParaRPr>
-                    </a:p>
-                  </a:txBody>
-                  <a:tcPr marL="91440" marR="91440" marT="45720" marB="45720" anchor="ctr">
-                    <a:lnL w="12700" cap="flat" cmpd="sng" algn="ctr">
-                      <a:solidFill>
-                        <a:srgbClr val="E5E7EB"/>
-                      </a:solidFill>
-                      <a:prstDash val="solid"/>
-                      <a:round/>
-                      <a:headEnd type="none" w="med" len="med"/>
-                      <a:tailEnd type="none" w="med" len="med"/>
-                    </a:lnL>
-                    <a:lnR w="12700" cap="flat" cmpd="sng" algn="ctr">
-                      <a:solidFill>
-                        <a:srgbClr val="E5E7EB"/>
-                      </a:solidFill>
-                      <a:prstDash val="solid"/>
-                      <a:round/>
-                      <a:headEnd type="none" w="med" len="med"/>
-                      <a:tailEnd type="none" w="med" len="med"/>
-                    </a:lnR>
-                    <a:lnT w="12700" cap="flat" cmpd="sng" algn="ctr">
-                      <a:solidFill>
-                        <a:srgbClr val="E5E7EB"/>
-                      </a:solidFill>
-                      <a:prstDash val="solid"/>
-                      <a:round/>
-                      <a:headEnd type="none" w="med" len="med"/>
-                      <a:tailEnd type="none" w="med" len="med"/>
-                    </a:lnT>
-                    <a:lnB w="12700" cap="flat" cmpd="sng" algn="ctr">
-                      <a:solidFill>
-                        <a:srgbClr val="E5E7EB"/>
-                      </a:solidFill>
-                      <a:prstDash val="solid"/>
-                      <a:round/>
-                      <a:headEnd type="none" w="med" len="med"/>
-                      <a:tailEnd type="none" w="med" len="med"/>
-                    </a:lnB>
-                  </a:tcPr>
-                </a:tc>
-                <a:tc>
-                  <a:txBody>
-                    <a:bodyPr/>
-                    <a:lstStyle/>
-                    <a:p>
-                      <a:pPr indent="0" marL="0">
-                        <a:buNone/>
-                      </a:pPr>
-                      <a:r>
-                        <a:rPr lang="en-US" sz="1400" dirty="0">
-                          <a:solidFill>
-                            <a:srgbClr val="111827"/>
-                          </a:solidFill>
-                          <a:latin typeface="Noto Sans JP" pitchFamily="34" charset="0"/>
-                          <a:ea typeface="Noto Sans JP" pitchFamily="34" charset="-122"/>
-                          <a:cs typeface="Noto Sans JP" pitchFamily="34" charset="-120"/>
-                        </a:rPr>
-                        <a:t>3/5</a:t>
-                      </a:r>
-                      <a:endParaRPr lang="en-US" sz="1400" dirty="0">
-                        <a:latin typeface="Noto Sans JP" charset="0"/>
-                        <a:ea typeface="Noto Sans JP" charset="0"/>
-                        <a:cs typeface="Noto Sans JP" charset="0"/>
-                      </a:endParaRPr>
-                    </a:p>
-                  </a:txBody>
-                  <a:tcPr marL="91440" marR="91440" marT="45720" marB="45720" anchor="ctr">
-                    <a:lnL w="12700" cap="flat" cmpd="sng" algn="ctr">
-                      <a:solidFill>
-                        <a:srgbClr val="E5E7EB"/>
-                      </a:solidFill>
-                      <a:prstDash val="solid"/>
-                      <a:round/>
-                      <a:headEnd type="none" w="med" len="med"/>
-                      <a:tailEnd type="none" w="med" len="med"/>
-                    </a:lnL>
-                    <a:lnR w="12700" cap="flat" cmpd="sng" algn="ctr">
-                      <a:solidFill>
-                        <a:srgbClr val="E5E7EB"/>
-                      </a:solidFill>
-                      <a:prstDash val="solid"/>
-                      <a:round/>
-                      <a:headEnd type="none" w="med" len="med"/>
-                      <a:tailEnd type="none" w="med" len="med"/>
-                    </a:lnR>
-                    <a:lnT w="12700" cap="flat" cmpd="sng" algn="ctr">
-                      <a:solidFill>
-                        <a:srgbClr val="E5E7EB"/>
-                      </a:solidFill>
-                      <a:prstDash val="solid"/>
-                      <a:round/>
-                      <a:headEnd type="none" w="med" len="med"/>
-                      <a:tailEnd type="none" w="med" len="med"/>
-                    </a:lnT>
-                    <a:lnB w="12700" cap="flat" cmpd="sng" algn="ctr">
-                      <a:solidFill>
-                        <a:srgbClr val="E5E7EB"/>
-                      </a:solidFill>
-                      <a:prstDash val="solid"/>
-                      <a:round/>
-                      <a:headEnd type="none" w="med" len="med"/>
-                      <a:tailEnd type="none" w="med" len="med"/>
-                    </a:lnB>
-                  </a:tcPr>
-                </a:tc>
-                <a:tc>
-                  <a:txBody>
-                    <a:bodyPr/>
-                    <a:lstStyle/>
-                    <a:p>
-                      <a:pPr indent="0" marL="0">
-                        <a:buNone/>
-                      </a:pPr>
-                      <a:r>
-                        <a:rPr lang="en-US" sz="1400" dirty="0">
-                          <a:solidFill>
-                            <a:srgbClr val="111827"/>
-                          </a:solidFill>
-                          <a:latin typeface="Noto Sans JP" pitchFamily="34" charset="0"/>
-                          <a:ea typeface="Noto Sans JP" pitchFamily="34" charset="-122"/>
-                          <a:cs typeface="Noto Sans JP" pitchFamily="34" charset="-120"/>
-                        </a:rPr>
-                        <a:t>適性あり</a:t>
-                      </a:r>
-                      <a:endParaRPr lang="en-US" sz="1400" dirty="0">
-                        <a:latin typeface="Noto Sans JP" charset="0"/>
-                        <a:ea typeface="Noto Sans JP" charset="0"/>
-                        <a:cs typeface="Noto Sans JP" charset="0"/>
-                      </a:endParaRPr>
-                    </a:p>
-                  </a:txBody>
-                  <a:tcPr marL="91440" marR="91440" marT="45720" marB="45720" anchor="ctr">
-                    <a:lnL w="12700" cap="flat" cmpd="sng" algn="ctr">
-                      <a:solidFill>
-                        <a:srgbClr val="E5E7EB"/>
-                      </a:solidFill>
-                      <a:prstDash val="solid"/>
-                      <a:round/>
-                      <a:headEnd type="none" w="med" len="med"/>
-                      <a:tailEnd type="none" w="med" len="med"/>
-                    </a:lnL>
-                    <a:lnR w="12700" cap="flat" cmpd="sng" algn="ctr">
-                      <a:solidFill>
-                        <a:srgbClr val="E5E7EB"/>
-                      </a:solidFill>
-                      <a:prstDash val="solid"/>
-                      <a:round/>
-                      <a:headEnd type="none" w="med" len="med"/>
-                      <a:tailEnd type="none" w="med" len="med"/>
-                    </a:lnR>
-                    <a:lnT w="12700" cap="flat" cmpd="sng" algn="ctr">
-                      <a:solidFill>
-                        <a:srgbClr val="E5E7EB"/>
-                      </a:solidFill>
-                      <a:prstDash val="solid"/>
-                      <a:round/>
-                      <a:headEnd type="none" w="med" len="med"/>
-                      <a:tailEnd type="none" w="med" len="med"/>
-                    </a:lnT>
-                    <a:lnB w="12700" cap="flat" cmpd="sng" algn="ctr">
-                      <a:solidFill>
-                        <a:srgbClr val="E5E7EB"/>
-                      </a:solidFill>
-                      <a:prstDash val="solid"/>
-                      <a:round/>
-                      <a:headEnd type="none" w="med" len="med"/>
-                      <a:tailEnd type="none" w="med" len="med"/>
-                    </a:lnB>
-                  </a:tcPr>
-                </a:tc>
-                <a:tc>
-                  <a:txBody>
-                    <a:bodyPr/>
-                    <a:lstStyle/>
-                    <a:p>
-                      <a:pPr indent="0" marL="0">
-                        <a:buNone/>
-                      </a:pPr>
-                      <a:r>
-                        <a:rPr lang="en-US" sz="1400" dirty="0">
-                          <a:solidFill>
-                            <a:srgbClr val="111827"/>
-                          </a:solidFill>
-                          <a:latin typeface="Noto Sans JP" pitchFamily="34" charset="0"/>
-                          <a:ea typeface="Noto Sans JP" pitchFamily="34" charset="-122"/>
-                          <a:cs typeface="Noto Sans JP" pitchFamily="34" charset="-120"/>
-                        </a:rPr>
-                        <a:t>200万人超の大型チャンネルが複数存続し、テレビ番組「やりすぎ都市伝説」との連動やファンイベント開催など需要は堅牢（視聴者関心度5点）。あるごめとりいが約3年で登録者100万人を達成した実績があるが、既存の大型ポジションとの競合はやや厳しく、飽和度は「中程度」と評価されているため短期急成長ポテンシャルは3点。最大の強みは自動生成適性で、ChatGPT（台本）→Midjourney（画像生成）→Runway（動画化）→Vrew（音声・字幕自動生成）という具体的かつ低コストな全自動制作フローが業界実績として確認されており、3ジャンル中もっとも「自宅完結・自動化」の再現性が高い。</a:t>
-                      </a:r>
-                      <a:endParaRPr lang="en-US" sz="1400" dirty="0">
-                        <a:latin typeface="Noto Sans JP" charset="0"/>
-                        <a:ea typeface="Noto Sans JP" charset="0"/>
-                        <a:cs typeface="Noto Sans JP" charset="0"/>
-                      </a:endParaRPr>
-                    </a:p>
-                  </a:txBody>
-                  <a:tcPr marL="91440" marR="91440" marT="45720" marB="45720" anchor="ctr">
-                    <a:lnL w="12700" cap="flat" cmpd="sng" algn="ctr">
-                      <a:solidFill>
-                        <a:srgbClr val="E5E7EB"/>
-                      </a:solidFill>
-                      <a:prstDash val="solid"/>
-                      <a:round/>
-                      <a:headEnd type="none" w="med" len="med"/>
-                      <a:tailEnd type="none" w="med" len="med"/>
-                    </a:lnL>
-                    <a:lnR w="12700" cap="flat" cmpd="sng" algn="ctr">
-                      <a:solidFill>
-                        <a:srgbClr val="E5E7EB"/>
-                      </a:solidFill>
-                      <a:prstDash val="solid"/>
-                      <a:round/>
-                      <a:headEnd type="none" w="med" len="med"/>
-                      <a:tailEnd type="none" w="med" len="med"/>
-                    </a:lnR>
-                    <a:lnT w="12700" cap="flat" cmpd="sng" algn="ctr">
-                      <a:solidFill>
-                        <a:srgbClr val="E5E7EB"/>
-                      </a:solidFill>
-                      <a:prstDash val="solid"/>
-                      <a:round/>
-                      <a:headEnd type="none" w="med" len="med"/>
-                      <a:tailEnd type="none" w="med" len="med"/>
-                    </a:lnT>
-                    <a:lnB w="12700" cap="flat" cmpd="sng" algn="ctr">
-                      <a:solidFill>
-                        <a:srgbClr val="E5E7EB"/>
-                      </a:solidFill>
-                      <a:prstDash val="solid"/>
-                      <a:round/>
-                      <a:headEnd type="none" w="med" len="med"/>
-                      <a:tailEnd type="none" w="med" len="med"/>
-                    </a:lnB>
-                  </a:tcPr>
-                </a:tc>
-              </a:tr>
-            </a:tbl>
-          </a:graphicData>
-        </a:graphic>
-      </p:graphicFrame>
+      <p:sp>
+        <p:nvSpPr>
+          <p:cNvPr id="3" name="Text 1"/>
+          <p:cNvSpPr/>
+          <p:nvPr/>
+        </p:nvSpPr>
+        <p:spPr>
+          <a:xfrm>
+            <a:off x="457200" y="1280160"/>
+            <a:ext cx="8229600" cy="319980"/>
+          </a:xfrm>
+          <a:prstGeom prst="rect">
+            <a:avLst/>
+          </a:prstGeom>
+          <a:noFill/>
+          <a:ln/>
+        </p:spPr>
+        <p:txBody>
+          <a:bodyPr wrap="square" lIns="0" tIns="0" rIns="0" bIns="0" rtlCol="0" anchor="t"/>
+          <a:lstStyle/>
+          <a:p>
+            <a:pPr indent="0" marL="0">
+              <a:buNone/>
+            </a:pPr>
+            <a:r>
+              <a:rPr lang="en-US" sz="1800" dirty="0">
+                <a:solidFill>
+                  <a:srgbClr val="111827"/>
+                </a:solidFill>
+                <a:latin typeface="Noto Sans JP" pitchFamily="34" charset="0"/>
+                <a:ea typeface="Noto Sans JP" pitchFamily="34" charset="-122"/>
+                <a:cs typeface="Noto Sans JP" pitchFamily="34" charset="-120"/>
+              </a:rPr>
+              <a:t>抱えるため、3ジャンル中では優先度が最も低い。</a:t>
+            </a:r>
+            <a:endParaRPr lang="en-US" sz="1800" dirty="0"/>
+          </a:p>
+        </p:txBody>
+      </p:sp>
     </p:spTree>
   </p:cSld>
   <p:clrMapOvr>
@@ -2675,7 +1967,7 @@
                 <a:ea typeface="Noto Sans JP" pitchFamily="34" charset="-122"/>
                 <a:cs typeface="Noto Sans JP" pitchFamily="34" charset="-120"/>
               </a:rPr>
-              <a:t>比較表（自宅完結・自動生成に向くジャンル）（続き 2）</a:t>
+              <a:t>比較表（自宅完結・自動生成に向くジャンル）</a:t>
             </a:r>
             <a:endParaRPr lang="en-US" sz="2400" dirty="0"/>
           </a:p>
@@ -2711,7 +2003,7 @@
                 <a:gridCol w="843142"/>
                 <a:gridCol w="4333632"/>
               </a:tblGrid>
-              <a:tr h="831979">
+              <a:tr h="1152525">
                 <a:tc>
                   <a:txBody>
                     <a:bodyPr/>
@@ -3121,7 +2413,7 @@
                   </a:tcPr>
                 </a:tc>
               </a:tr>
-              <a:tr h="2688461">
+              <a:tr h="2124075">
                 <a:tc>
                   <a:txBody>
                     <a:bodyPr/>
@@ -3131,7 +2423,7 @@
                         <a:buNone/>
                       </a:pPr>
                       <a:r>
-                        <a:rPr lang="en-US" sz="1400" dirty="0">
+                        <a:rPr lang="en-US" sz="1100" dirty="0">
                           <a:solidFill>
                             <a:srgbClr val="111827"/>
                           </a:solidFill>
@@ -3139,9 +2431,9 @@
                           <a:ea typeface="Noto Sans JP" pitchFamily="34" charset="-122"/>
                           <a:cs typeface="Noto Sans JP" pitchFamily="34" charset="-120"/>
                         </a:rPr>
-                        <a:t>2</a:t>
+                        <a:t>1</a:t>
                       </a:r>
-                      <a:endParaRPr lang="en-US" sz="1400" dirty="0">
+                      <a:endParaRPr lang="en-US" sz="1100" dirty="0">
                         <a:latin typeface="Noto Sans JP" charset="0"/>
                         <a:ea typeface="Noto Sans JP" charset="0"/>
                         <a:cs typeface="Noto Sans JP" charset="0"/>
@@ -3196,7 +2488,7 @@
                         <a:buNone/>
                       </a:pPr>
                       <a:r>
-                        <a:rPr lang="en-US" sz="1400" dirty="0">
+                        <a:rPr lang="en-US" sz="1100" dirty="0">
                           <a:solidFill>
                             <a:srgbClr val="111827"/>
                           </a:solidFill>
@@ -3204,9 +2496,9 @@
                           <a:ea typeface="Noto Sans JP" pitchFamily="34" charset="-122"/>
                           <a:cs typeface="Noto Sans JP" pitchFamily="34" charset="-120"/>
                         </a:rPr>
-                        <a:t>占い・スピリチュアル（九星気学含む）</a:t>
+                        <a:t>都市伝説・雑学解説</a:t>
                       </a:r>
-                      <a:endParaRPr lang="en-US" sz="1400" dirty="0">
+                      <a:endParaRPr lang="en-US" sz="1100" dirty="0">
                         <a:latin typeface="Noto Sans JP" charset="0"/>
                         <a:ea typeface="Noto Sans JP" charset="0"/>
                         <a:cs typeface="Noto Sans JP" charset="0"/>
@@ -3261,7 +2553,7 @@
                         <a:buNone/>
                       </a:pPr>
                       <a:r>
-                        <a:rPr lang="en-US" sz="1400" dirty="0">
+                        <a:rPr lang="en-US" sz="1100" dirty="0">
                           <a:solidFill>
                             <a:srgbClr val="111827"/>
                           </a:solidFill>
@@ -3271,7 +2563,7 @@
                         </a:rPr>
                         <a:t>5/5</a:t>
                       </a:r>
-                      <a:endParaRPr lang="en-US" sz="1400" dirty="0">
+                      <a:endParaRPr lang="en-US" sz="1100" dirty="0">
                         <a:latin typeface="Noto Sans JP" charset="0"/>
                         <a:ea typeface="Noto Sans JP" charset="0"/>
                         <a:cs typeface="Noto Sans JP" charset="0"/>
@@ -3326,7 +2618,7 @@
                         <a:buNone/>
                       </a:pPr>
                       <a:r>
-                        <a:rPr lang="en-US" sz="1400" dirty="0">
+                        <a:rPr lang="en-US" sz="1100" dirty="0">
                           <a:solidFill>
                             <a:srgbClr val="111827"/>
                           </a:solidFill>
@@ -3336,7 +2628,7 @@
                         </a:rPr>
                         <a:t>3/5</a:t>
                       </a:r>
-                      <a:endParaRPr lang="en-US" sz="1400" dirty="0">
+                      <a:endParaRPr lang="en-US" sz="1100" dirty="0">
                         <a:latin typeface="Noto Sans JP" charset="0"/>
                         <a:ea typeface="Noto Sans JP" charset="0"/>
                         <a:cs typeface="Noto Sans JP" charset="0"/>
@@ -3391,7 +2683,7 @@
                         <a:buNone/>
                       </a:pPr>
                       <a:r>
-                        <a:rPr lang="en-US" sz="1400" dirty="0">
+                        <a:rPr lang="en-US" sz="1100" dirty="0">
                           <a:solidFill>
                             <a:srgbClr val="111827"/>
                           </a:solidFill>
@@ -3401,7 +2693,7 @@
                         </a:rPr>
                         <a:t>適性あり</a:t>
                       </a:r>
-                      <a:endParaRPr lang="en-US" sz="1400" dirty="0">
+                      <a:endParaRPr lang="en-US" sz="1100" dirty="0">
                         <a:latin typeface="Noto Sans JP" charset="0"/>
                         <a:ea typeface="Noto Sans JP" charset="0"/>
                         <a:cs typeface="Noto Sans JP" charset="0"/>
@@ -3456,7 +2748,7 @@
                         <a:buNone/>
                       </a:pPr>
                       <a:r>
-                        <a:rPr lang="en-US" sz="1400" dirty="0">
+                        <a:rPr lang="en-US" sz="1100" dirty="0">
                           <a:solidFill>
                             <a:srgbClr val="111827"/>
                           </a:solidFill>
@@ -3464,9 +2756,9 @@
                           <a:ea typeface="Noto Sans JP" pitchFamily="34" charset="-122"/>
                           <a:cs typeface="Noto Sans JP" pitchFamily="34" charset="-120"/>
                         </a:rPr>
-                        <a:t>占い市場全体は約1兆円規模で成長中。タロット系「唯ひかり」は2019年のバズから数ヶ月で登録者10万人を突破し、短期急成長の明確な実例がある一方、これは直近の事例ではなく単発であるため短期急成長ポテンシャルは3点にとどめた。自動生成適性は高く、九星気学は生年月日という客観データに基づくため台本の自動生成・月替わりテンプレート運用がしやすく（気学9ガールズは自動化適性★5評価）、年末年始の季節需要というリピート検索の強みも持つ。ただし九星気学特化チャンネル（気学9ガールズ、竹下宏の九星気学）の登録者数・再生数は調査上未確認（情報不足）であり、都市伝説ほど定量的な裏付けが厚くない点に留意。</a:t>
+                        <a:t>200万人超の大型チャンネルが複数存続し、テレビ番組「やりすぎ都市伝説」との連動やファンイベント開催など需要は堅牢（視聴者関心度5点）。あるごめとりいが約3年で登録者100万人を達成した実績があるが、既存の大型ポジションとの競合はやや厳しく、飽和度は「中程度」と評価されているため短期急成長ポテンシャルは3点。最大の強みは自動生成適性で、ChatGPT（台本）→Midjourney（画像生成）→Runway（動画化）→Vrew（音声・字幕自動生成）という具体的かつ低コストな全自動制作フローが業界実績として確認されており、3ジャンル中もっとも「自宅完結・自動化」の再現性が高い。</a:t>
                       </a:r>
-                      <a:endParaRPr lang="en-US" sz="1400" dirty="0">
+                      <a:endParaRPr lang="en-US" sz="1100" dirty="0">
                         <a:latin typeface="Noto Sans JP" charset="0"/>
                         <a:ea typeface="Noto Sans JP" charset="0"/>
                         <a:cs typeface="Noto Sans JP" charset="0"/>
@@ -3575,7 +2867,7 @@
                 <a:ea typeface="Noto Sans JP" pitchFamily="34" charset="-122"/>
                 <a:cs typeface="Noto Sans JP" pitchFamily="34" charset="-120"/>
               </a:rPr>
-              <a:t>比較表（自宅完結・自動生成に向くジャンル）（続き 3）</a:t>
+              <a:t>比較表（自宅完結・自動生成に向くジャンル）（続き 1）</a:t>
             </a:r>
             <a:endParaRPr lang="en-US" sz="2400" dirty="0"/>
           </a:p>
@@ -3611,7 +2903,7 @@
                 <a:gridCol w="843142"/>
                 <a:gridCol w="4333632"/>
               </a:tblGrid>
-              <a:tr h="878295">
+              <a:tr h="1152525">
                 <a:tc>
                   <a:txBody>
                     <a:bodyPr/>
@@ -4021,7 +3313,7 @@
                   </a:tcPr>
                 </a:tc>
               </a:tr>
-              <a:tr h="2642145">
+              <a:tr h="2324100">
                 <a:tc>
                   <a:txBody>
                     <a:bodyPr/>
@@ -4031,7 +3323,7 @@
                         <a:buNone/>
                       </a:pPr>
                       <a:r>
-                        <a:rPr lang="en-US" sz="1400" dirty="0">
+                        <a:rPr lang="en-US" sz="1100" dirty="0">
                           <a:solidFill>
                             <a:srgbClr val="111827"/>
                           </a:solidFill>
@@ -4039,9 +3331,9 @@
                           <a:ea typeface="Noto Sans JP" pitchFamily="34" charset="-122"/>
                           <a:cs typeface="Noto Sans JP" pitchFamily="34" charset="-120"/>
                         </a:rPr>
-                        <a:t>3</a:t>
+                        <a:t>2</a:t>
                       </a:r>
-                      <a:endParaRPr lang="en-US" sz="1400" dirty="0">
+                      <a:endParaRPr lang="en-US" sz="1100" dirty="0">
                         <a:latin typeface="Noto Sans JP" charset="0"/>
                         <a:ea typeface="Noto Sans JP" charset="0"/>
                         <a:cs typeface="Noto Sans JP" charset="0"/>
@@ -4096,7 +3388,7 @@
                         <a:buNone/>
                       </a:pPr>
                       <a:r>
-                        <a:rPr lang="en-US" sz="1400" dirty="0">
+                        <a:rPr lang="en-US" sz="1100" dirty="0">
                           <a:solidFill>
                             <a:srgbClr val="111827"/>
                           </a:solidFill>
@@ -4104,9 +3396,9 @@
                           <a:ea typeface="Noto Sans JP" pitchFamily="34" charset="-122"/>
                           <a:cs typeface="Noto Sans JP" pitchFamily="34" charset="-120"/>
                         </a:rPr>
-                        <a:t>ビジネス書・自己啓発の要約</a:t>
+                        <a:t>占い・スピリチュアル（九星気学含む）</a:t>
                       </a:r>
-                      <a:endParaRPr lang="en-US" sz="1400" dirty="0">
+                      <a:endParaRPr lang="en-US" sz="1100" dirty="0">
                         <a:latin typeface="Noto Sans JP" charset="0"/>
                         <a:ea typeface="Noto Sans JP" charset="0"/>
                         <a:cs typeface="Noto Sans JP" charset="0"/>
@@ -4161,7 +3453,7 @@
                         <a:buNone/>
                       </a:pPr>
                       <a:r>
-                        <a:rPr lang="en-US" sz="1400" dirty="0">
+                        <a:rPr lang="en-US" sz="1100" dirty="0">
                           <a:solidFill>
                             <a:srgbClr val="111827"/>
                           </a:solidFill>
@@ -4171,7 +3463,7 @@
                         </a:rPr>
                         <a:t>5/5</a:t>
                       </a:r>
-                      <a:endParaRPr lang="en-US" sz="1400" dirty="0">
+                      <a:endParaRPr lang="en-US" sz="1100" dirty="0">
                         <a:latin typeface="Noto Sans JP" charset="0"/>
                         <a:ea typeface="Noto Sans JP" charset="0"/>
                         <a:cs typeface="Noto Sans JP" charset="0"/>
@@ -4226,7 +3518,7 @@
                         <a:buNone/>
                       </a:pPr>
                       <a:r>
-                        <a:rPr lang="en-US" sz="1400" dirty="0">
+                        <a:rPr lang="en-US" sz="1100" dirty="0">
                           <a:solidFill>
                             <a:srgbClr val="111827"/>
                           </a:solidFill>
@@ -4234,9 +3526,9 @@
                           <a:ea typeface="Noto Sans JP" pitchFamily="34" charset="-122"/>
                           <a:cs typeface="Noto Sans JP" pitchFamily="34" charset="-120"/>
                         </a:rPr>
-                        <a:t>1/5</a:t>
+                        <a:t>3/5</a:t>
                       </a:r>
-                      <a:endParaRPr lang="en-US" sz="1400" dirty="0">
+                      <a:endParaRPr lang="en-US" sz="1100" dirty="0">
                         <a:latin typeface="Noto Sans JP" charset="0"/>
                         <a:ea typeface="Noto Sans JP" charset="0"/>
                         <a:cs typeface="Noto Sans JP" charset="0"/>
@@ -4291,7 +3583,7 @@
                         <a:buNone/>
                       </a:pPr>
                       <a:r>
-                        <a:rPr lang="en-US" sz="1400" dirty="0">
+                        <a:rPr lang="en-US" sz="1100" dirty="0">
                           <a:solidFill>
                             <a:srgbClr val="111827"/>
                           </a:solidFill>
@@ -4301,7 +3593,7 @@
                         </a:rPr>
                         <a:t>適性あり</a:t>
                       </a:r>
-                      <a:endParaRPr lang="en-US" sz="1400" dirty="0">
+                      <a:endParaRPr lang="en-US" sz="1100" dirty="0">
                         <a:latin typeface="Noto Sans JP" charset="0"/>
                         <a:ea typeface="Noto Sans JP" charset="0"/>
                         <a:cs typeface="Noto Sans JP" charset="0"/>
@@ -4356,7 +3648,7 @@
                         <a:buNone/>
                       </a:pPr>
                       <a:r>
-                        <a:rPr lang="en-US" sz="1400" dirty="0">
+                        <a:rPr lang="en-US" sz="1100" dirty="0">
                           <a:solidFill>
                             <a:srgbClr val="111827"/>
                           </a:solidFill>
@@ -4364,9 +3656,9 @@
                           <a:ea typeface="Noto Sans JP" pitchFamily="34" charset="-122"/>
                           <a:cs typeface="Noto Sans JP" pitchFamily="34" charset="-120"/>
                         </a:rPr>
-                        <a:t>本要約チャンネル（167万人）、中田敦彦のYouTube大学（300万人以上）など大手が既に市場を確立しており、視聴者需要自体は根強い（5点）。一方、2025年以降に新規開設されたチャンネルの急成長事例は調査範囲内で「見当たらない」と明確に報告されており、既存大手中心の飽和市場であるため短期急成長ポテンシャルは1点。自動生成適性自体は技術的に高い（VYOND・VOICEPEAK・VOICEVOX等のツールで本要約チャンネルは毎日投稿を実現）が、書籍要約は著作権法上「翻案権」に触れるグレーゾーンであり、他2ジャンルにはない固有の法的リスクを抱える点が実運用上のマイナス要因。</a:t>
+                        <a:t>占い市場全体は約1兆円規模で成長中。タロット系「唯ひかり」は2019年のバズから数ヶ月で登録者10万人を突破し、短期急成長の明確な実例がある一方、これは直近の事例ではなく単発であるため短期急成長ポテンシャルは3点にとどめた。自動生成適性は高く、九星気学は生年月日という客観データに基づくため台本の自動生成・月替わりテンプレート運用がしやすく（気学9ガールズは自動化適性★5評価）、年末年始の季節需要というリピート検索の強みも持つ。ただし九星気学特化チャンネル（気学9ガールズ、竹下宏の九星気学）の登録者数・再生数は調査上未確認（情報不足）であり、都市伝説ほど定量的な裏付けが厚くない点に留意。</a:t>
                       </a:r>
-                      <a:endParaRPr lang="en-US" sz="1400" dirty="0">
+                      <a:endParaRPr lang="en-US" sz="1100" dirty="0">
                         <a:latin typeface="Noto Sans JP" charset="0"/>
                         <a:ea typeface="Noto Sans JP" charset="0"/>
                         <a:cs typeface="Noto Sans JP" charset="0"/>
@@ -4428,6 +3720,906 @@
 <file path=ppt/slides/slide6.xml><?xml version="1.0" encoding="utf-8"?>
 <p:sld xmlns:a="http://schemas.openxmlformats.org/drawingml/2006/main" xmlns:r="http://schemas.openxmlformats.org/officeDocument/2006/relationships" xmlns:p="http://schemas.openxmlformats.org/presentationml/2006/main">
   <p:cSld name="Slide 6">
+    <p:spTree>
+      <p:nvGrpSpPr>
+        <p:cNvPr id="1" name=""/>
+        <p:cNvGrpSpPr/>
+        <p:nvPr/>
+      </p:nvGrpSpPr>
+      <p:grpSpPr>
+        <a:xfrm>
+          <a:off x="0" y="0"/>
+          <a:ext cx="0" cy="0"/>
+          <a:chOff x="0" y="0"/>
+          <a:chExt cx="0" cy="0"/>
+        </a:xfrm>
+      </p:grpSpPr>
+      <p:sp>
+        <p:nvSpPr>
+          <p:cNvPr id="2" name="Text 0"/>
+          <p:cNvSpPr/>
+          <p:nvPr/>
+        </p:nvSpPr>
+        <p:spPr>
+          <a:xfrm>
+            <a:off x="457200" y="274320"/>
+            <a:ext cx="8229600" cy="822960"/>
+          </a:xfrm>
+          <a:prstGeom prst="rect">
+            <a:avLst/>
+          </a:prstGeom>
+          <a:noFill/>
+          <a:ln/>
+        </p:spPr>
+        <p:txBody>
+          <a:bodyPr wrap="square" lIns="0" tIns="0" rIns="0" bIns="0" rtlCol="0" anchor="ctr"/>
+          <a:lstStyle/>
+          <a:p>
+            <a:pPr indent="0" marL="0">
+              <a:buNone/>
+            </a:pPr>
+            <a:r>
+              <a:rPr lang="en-US" sz="2400" b="1" dirty="0">
+                <a:solidFill>
+                  <a:srgbClr val="DC2626"/>
+                </a:solidFill>
+                <a:latin typeface="Noto Sans JP" pitchFamily="34" charset="0"/>
+                <a:ea typeface="Noto Sans JP" pitchFamily="34" charset="-122"/>
+                <a:cs typeface="Noto Sans JP" pitchFamily="34" charset="-120"/>
+              </a:rPr>
+              <a:t>比較表（自宅完結・自動生成に向くジャンル）（続き 2）</a:t>
+            </a:r>
+            <a:endParaRPr lang="en-US" sz="2400" dirty="0"/>
+          </a:p>
+        </p:txBody>
+      </p:sp>
+      <p:graphicFrame>
+        <p:nvGraphicFramePr>
+          <p:cNvPr id="7" name="Table 0"/>
+          <p:cNvGraphicFramePr>
+            <a:graphicFrameLocks noGrp="1"/>
+          </p:cNvGraphicFramePr>
+          <p:nvPr>
+            <p:extLst>
+              <p:ext uri="{D42A27DB-BD31-4B8C-83A1-F6EECF244321}">
+                <p14:modId xmlns:p14="http://schemas.microsoft.com/office/powerpoint/2010/main" val="1579011935"/>
+              </p:ext>
+            </p:extLst>
+          </p:nvPr>
+        </p:nvGraphicFramePr>
+        <p:xfrm>
+          <a:off x="457200" y="1280160"/>
+          <a:ext cx="8229600" cy="914400"/>
+        </p:xfrm>
+        <a:graphic>
+          <a:graphicData uri="http://schemas.openxmlformats.org/drawingml/2006/table">
+            <a:tbl>
+              <a:tblPr/>
+              <a:tblGrid>
+                <a:gridCol w="508434"/>
+                <a:gridCol w="1078550"/>
+                <a:gridCol w="622701"/>
+                <a:gridCol w="843142"/>
+                <a:gridCol w="843142"/>
+                <a:gridCol w="4333632"/>
+              </a:tblGrid>
+              <a:tr h="1152525">
+                <a:tc>
+                  <a:txBody>
+                    <a:bodyPr/>
+                    <a:lstStyle/>
+                    <a:p>
+                      <a:pPr algn="ctr" indent="0" marL="0">
+                        <a:buNone/>
+                      </a:pPr>
+                      <a:r>
+                        <a:rPr lang="en-US" sz="1400" b="1" dirty="0">
+                          <a:solidFill>
+                            <a:srgbClr val="FFFFFF"/>
+                          </a:solidFill>
+                          <a:latin typeface="Noto Sans JP" pitchFamily="34" charset="0"/>
+                          <a:ea typeface="Noto Sans JP" pitchFamily="34" charset="-122"/>
+                          <a:cs typeface="Noto Sans JP" pitchFamily="34" charset="-120"/>
+                        </a:rPr>
+                        <a:t>順位</a:t>
+                      </a:r>
+                      <a:endParaRPr lang="en-US" sz="1400" dirty="0">
+                        <a:latin typeface="Noto Sans JP" charset="0"/>
+                        <a:ea typeface="Noto Sans JP" charset="0"/>
+                        <a:cs typeface="Noto Sans JP" charset="0"/>
+                      </a:endParaRPr>
+                    </a:p>
+                  </a:txBody>
+                  <a:tcPr marL="91440" marR="91440" marT="45720" marB="45720" anchor="ctr">
+                    <a:lnL w="12700" cap="flat" cmpd="sng" algn="ctr">
+                      <a:solidFill>
+                        <a:srgbClr val="E5E7EB"/>
+                      </a:solidFill>
+                      <a:prstDash val="solid"/>
+                      <a:round/>
+                      <a:headEnd type="none" w="med" len="med"/>
+                      <a:tailEnd type="none" w="med" len="med"/>
+                    </a:lnL>
+                    <a:lnR w="12700" cap="flat" cmpd="sng" algn="ctr">
+                      <a:solidFill>
+                        <a:srgbClr val="E5E7EB"/>
+                      </a:solidFill>
+                      <a:prstDash val="solid"/>
+                      <a:round/>
+                      <a:headEnd type="none" w="med" len="med"/>
+                      <a:tailEnd type="none" w="med" len="med"/>
+                    </a:lnR>
+                    <a:lnT w="12700" cap="flat" cmpd="sng" algn="ctr">
+                      <a:solidFill>
+                        <a:srgbClr val="E5E7EB"/>
+                      </a:solidFill>
+                      <a:prstDash val="solid"/>
+                      <a:round/>
+                      <a:headEnd type="none" w="med" len="med"/>
+                      <a:tailEnd type="none" w="med" len="med"/>
+                    </a:lnT>
+                    <a:lnB w="12700" cap="flat" cmpd="sng" algn="ctr">
+                      <a:solidFill>
+                        <a:srgbClr val="E5E7EB"/>
+                      </a:solidFill>
+                      <a:prstDash val="solid"/>
+                      <a:round/>
+                      <a:headEnd type="none" w="med" len="med"/>
+                      <a:tailEnd type="none" w="med" len="med"/>
+                    </a:lnB>
+                    <a:solidFill>
+                      <a:srgbClr val="374151"/>
+                    </a:solidFill>
+                  </a:tcPr>
+                </a:tc>
+                <a:tc>
+                  <a:txBody>
+                    <a:bodyPr/>
+                    <a:lstStyle/>
+                    <a:p>
+                      <a:pPr algn="ctr" indent="0" marL="0">
+                        <a:buNone/>
+                      </a:pPr>
+                      <a:r>
+                        <a:rPr lang="en-US" sz="1400" b="1" dirty="0">
+                          <a:solidFill>
+                            <a:srgbClr val="FFFFFF"/>
+                          </a:solidFill>
+                          <a:latin typeface="Noto Sans JP" pitchFamily="34" charset="0"/>
+                          <a:ea typeface="Noto Sans JP" pitchFamily="34" charset="-122"/>
+                          <a:cs typeface="Noto Sans JP" pitchFamily="34" charset="-120"/>
+                        </a:rPr>
+                        <a:t>ジャンル</a:t>
+                      </a:r>
+                      <a:endParaRPr lang="en-US" sz="1400" dirty="0">
+                        <a:latin typeface="Noto Sans JP" charset="0"/>
+                        <a:ea typeface="Noto Sans JP" charset="0"/>
+                        <a:cs typeface="Noto Sans JP" charset="0"/>
+                      </a:endParaRPr>
+                    </a:p>
+                  </a:txBody>
+                  <a:tcPr marL="91440" marR="91440" marT="45720" marB="45720" anchor="ctr">
+                    <a:lnL w="12700" cap="flat" cmpd="sng" algn="ctr">
+                      <a:solidFill>
+                        <a:srgbClr val="E5E7EB"/>
+                      </a:solidFill>
+                      <a:prstDash val="solid"/>
+                      <a:round/>
+                      <a:headEnd type="none" w="med" len="med"/>
+                      <a:tailEnd type="none" w="med" len="med"/>
+                    </a:lnL>
+                    <a:lnR w="12700" cap="flat" cmpd="sng" algn="ctr">
+                      <a:solidFill>
+                        <a:srgbClr val="E5E7EB"/>
+                      </a:solidFill>
+                      <a:prstDash val="solid"/>
+                      <a:round/>
+                      <a:headEnd type="none" w="med" len="med"/>
+                      <a:tailEnd type="none" w="med" len="med"/>
+                    </a:lnR>
+                    <a:lnT w="12700" cap="flat" cmpd="sng" algn="ctr">
+                      <a:solidFill>
+                        <a:srgbClr val="E5E7EB"/>
+                      </a:solidFill>
+                      <a:prstDash val="solid"/>
+                      <a:round/>
+                      <a:headEnd type="none" w="med" len="med"/>
+                      <a:tailEnd type="none" w="med" len="med"/>
+                    </a:lnT>
+                    <a:lnB w="12700" cap="flat" cmpd="sng" algn="ctr">
+                      <a:solidFill>
+                        <a:srgbClr val="E5E7EB"/>
+                      </a:solidFill>
+                      <a:prstDash val="solid"/>
+                      <a:round/>
+                      <a:headEnd type="none" w="med" len="med"/>
+                      <a:tailEnd type="none" w="med" len="med"/>
+                    </a:lnB>
+                    <a:solidFill>
+                      <a:srgbClr val="374151"/>
+                    </a:solidFill>
+                  </a:tcPr>
+                </a:tc>
+                <a:tc>
+                  <a:txBody>
+                    <a:bodyPr/>
+                    <a:lstStyle/>
+                    <a:p>
+                      <a:pPr algn="ctr" indent="0" marL="0">
+                        <a:buNone/>
+                      </a:pPr>
+                      <a:r>
+                        <a:rPr lang="en-US" sz="1400" b="1" dirty="0">
+                          <a:solidFill>
+                            <a:srgbClr val="FFFFFF"/>
+                          </a:solidFill>
+                          <a:latin typeface="Noto Sans JP" pitchFamily="34" charset="0"/>
+                          <a:ea typeface="Noto Sans JP" pitchFamily="34" charset="-122"/>
+                          <a:cs typeface="Noto Sans JP" pitchFamily="34" charset="-120"/>
+                        </a:rPr>
+                        <a:t>視聴者関心度</a:t>
+                      </a:r>
+                      <a:endParaRPr lang="en-US" sz="1400" dirty="0">
+                        <a:latin typeface="Noto Sans JP" charset="0"/>
+                        <a:ea typeface="Noto Sans JP" charset="0"/>
+                        <a:cs typeface="Noto Sans JP" charset="0"/>
+                      </a:endParaRPr>
+                    </a:p>
+                  </a:txBody>
+                  <a:tcPr marL="91440" marR="91440" marT="45720" marB="45720" anchor="ctr">
+                    <a:lnL w="12700" cap="flat" cmpd="sng" algn="ctr">
+                      <a:solidFill>
+                        <a:srgbClr val="E5E7EB"/>
+                      </a:solidFill>
+                      <a:prstDash val="solid"/>
+                      <a:round/>
+                      <a:headEnd type="none" w="med" len="med"/>
+                      <a:tailEnd type="none" w="med" len="med"/>
+                    </a:lnL>
+                    <a:lnR w="12700" cap="flat" cmpd="sng" algn="ctr">
+                      <a:solidFill>
+                        <a:srgbClr val="E5E7EB"/>
+                      </a:solidFill>
+                      <a:prstDash val="solid"/>
+                      <a:round/>
+                      <a:headEnd type="none" w="med" len="med"/>
+                      <a:tailEnd type="none" w="med" len="med"/>
+                    </a:lnR>
+                    <a:lnT w="12700" cap="flat" cmpd="sng" algn="ctr">
+                      <a:solidFill>
+                        <a:srgbClr val="E5E7EB"/>
+                      </a:solidFill>
+                      <a:prstDash val="solid"/>
+                      <a:round/>
+                      <a:headEnd type="none" w="med" len="med"/>
+                      <a:tailEnd type="none" w="med" len="med"/>
+                    </a:lnT>
+                    <a:lnB w="12700" cap="flat" cmpd="sng" algn="ctr">
+                      <a:solidFill>
+                        <a:srgbClr val="E5E7EB"/>
+                      </a:solidFill>
+                      <a:prstDash val="solid"/>
+                      <a:round/>
+                      <a:headEnd type="none" w="med" len="med"/>
+                      <a:tailEnd type="none" w="med" len="med"/>
+                    </a:lnB>
+                    <a:solidFill>
+                      <a:srgbClr val="374151"/>
+                    </a:solidFill>
+                  </a:tcPr>
+                </a:tc>
+                <a:tc>
+                  <a:txBody>
+                    <a:bodyPr/>
+                    <a:lstStyle/>
+                    <a:p>
+                      <a:pPr algn="ctr" indent="0" marL="0">
+                        <a:buNone/>
+                      </a:pPr>
+                      <a:r>
+                        <a:rPr lang="en-US" sz="1400" b="1" dirty="0">
+                          <a:solidFill>
+                            <a:srgbClr val="FFFFFF"/>
+                          </a:solidFill>
+                          <a:latin typeface="Noto Sans JP" pitchFamily="34" charset="0"/>
+                          <a:ea typeface="Noto Sans JP" pitchFamily="34" charset="-122"/>
+                          <a:cs typeface="Noto Sans JP" pitchFamily="34" charset="-120"/>
+                        </a:rPr>
+                        <a:t>短期急成長ポテンシャル</a:t>
+                      </a:r>
+                      <a:endParaRPr lang="en-US" sz="1400" dirty="0">
+                        <a:latin typeface="Noto Sans JP" charset="0"/>
+                        <a:ea typeface="Noto Sans JP" charset="0"/>
+                        <a:cs typeface="Noto Sans JP" charset="0"/>
+                      </a:endParaRPr>
+                    </a:p>
+                  </a:txBody>
+                  <a:tcPr marL="91440" marR="91440" marT="45720" marB="45720" anchor="ctr">
+                    <a:lnL w="12700" cap="flat" cmpd="sng" algn="ctr">
+                      <a:solidFill>
+                        <a:srgbClr val="E5E7EB"/>
+                      </a:solidFill>
+                      <a:prstDash val="solid"/>
+                      <a:round/>
+                      <a:headEnd type="none" w="med" len="med"/>
+                      <a:tailEnd type="none" w="med" len="med"/>
+                    </a:lnL>
+                    <a:lnR w="12700" cap="flat" cmpd="sng" algn="ctr">
+                      <a:solidFill>
+                        <a:srgbClr val="E5E7EB"/>
+                      </a:solidFill>
+                      <a:prstDash val="solid"/>
+                      <a:round/>
+                      <a:headEnd type="none" w="med" len="med"/>
+                      <a:tailEnd type="none" w="med" len="med"/>
+                    </a:lnR>
+                    <a:lnT w="12700" cap="flat" cmpd="sng" algn="ctr">
+                      <a:solidFill>
+                        <a:srgbClr val="E5E7EB"/>
+                      </a:solidFill>
+                      <a:prstDash val="solid"/>
+                      <a:round/>
+                      <a:headEnd type="none" w="med" len="med"/>
+                      <a:tailEnd type="none" w="med" len="med"/>
+                    </a:lnT>
+                    <a:lnB w="12700" cap="flat" cmpd="sng" algn="ctr">
+                      <a:solidFill>
+                        <a:srgbClr val="E5E7EB"/>
+                      </a:solidFill>
+                      <a:prstDash val="solid"/>
+                      <a:round/>
+                      <a:headEnd type="none" w="med" len="med"/>
+                      <a:tailEnd type="none" w="med" len="med"/>
+                    </a:lnB>
+                    <a:solidFill>
+                      <a:srgbClr val="374151"/>
+                    </a:solidFill>
+                  </a:tcPr>
+                </a:tc>
+                <a:tc>
+                  <a:txBody>
+                    <a:bodyPr/>
+                    <a:lstStyle/>
+                    <a:p>
+                      <a:pPr algn="ctr" indent="0" marL="0">
+                        <a:buNone/>
+                      </a:pPr>
+                      <a:r>
+                        <a:rPr lang="en-US" sz="1400" b="1" dirty="0">
+                          <a:solidFill>
+                            <a:srgbClr val="FFFFFF"/>
+                          </a:solidFill>
+                          <a:latin typeface="Noto Sans JP" pitchFamily="34" charset="0"/>
+                          <a:ea typeface="Noto Sans JP" pitchFamily="34" charset="-122"/>
+                          <a:cs typeface="Noto Sans JP" pitchFamily="34" charset="-120"/>
+                        </a:rPr>
+                        <a:t>自宅完結・自動生成適性</a:t>
+                      </a:r>
+                      <a:endParaRPr lang="en-US" sz="1400" dirty="0">
+                        <a:latin typeface="Noto Sans JP" charset="0"/>
+                        <a:ea typeface="Noto Sans JP" charset="0"/>
+                        <a:cs typeface="Noto Sans JP" charset="0"/>
+                      </a:endParaRPr>
+                    </a:p>
+                  </a:txBody>
+                  <a:tcPr marL="91440" marR="91440" marT="45720" marB="45720" anchor="ctr">
+                    <a:lnL w="12700" cap="flat" cmpd="sng" algn="ctr">
+                      <a:solidFill>
+                        <a:srgbClr val="E5E7EB"/>
+                      </a:solidFill>
+                      <a:prstDash val="solid"/>
+                      <a:round/>
+                      <a:headEnd type="none" w="med" len="med"/>
+                      <a:tailEnd type="none" w="med" len="med"/>
+                    </a:lnL>
+                    <a:lnR w="12700" cap="flat" cmpd="sng" algn="ctr">
+                      <a:solidFill>
+                        <a:srgbClr val="E5E7EB"/>
+                      </a:solidFill>
+                      <a:prstDash val="solid"/>
+                      <a:round/>
+                      <a:headEnd type="none" w="med" len="med"/>
+                      <a:tailEnd type="none" w="med" len="med"/>
+                    </a:lnR>
+                    <a:lnT w="12700" cap="flat" cmpd="sng" algn="ctr">
+                      <a:solidFill>
+                        <a:srgbClr val="E5E7EB"/>
+                      </a:solidFill>
+                      <a:prstDash val="solid"/>
+                      <a:round/>
+                      <a:headEnd type="none" w="med" len="med"/>
+                      <a:tailEnd type="none" w="med" len="med"/>
+                    </a:lnT>
+                    <a:lnB w="12700" cap="flat" cmpd="sng" algn="ctr">
+                      <a:solidFill>
+                        <a:srgbClr val="E5E7EB"/>
+                      </a:solidFill>
+                      <a:prstDash val="solid"/>
+                      <a:round/>
+                      <a:headEnd type="none" w="med" len="med"/>
+                      <a:tailEnd type="none" w="med" len="med"/>
+                    </a:lnB>
+                    <a:solidFill>
+                      <a:srgbClr val="374151"/>
+                    </a:solidFill>
+                  </a:tcPr>
+                </a:tc>
+                <a:tc>
+                  <a:txBody>
+                    <a:bodyPr/>
+                    <a:lstStyle/>
+                    <a:p>
+                      <a:pPr algn="ctr" indent="0" marL="0">
+                        <a:buNone/>
+                      </a:pPr>
+                      <a:r>
+                        <a:rPr lang="en-US" sz="1400" b="1" dirty="0">
+                          <a:solidFill>
+                            <a:srgbClr val="FFFFFF"/>
+                          </a:solidFill>
+                          <a:latin typeface="Noto Sans JP" pitchFamily="34" charset="0"/>
+                          <a:ea typeface="Noto Sans JP" pitchFamily="34" charset="-122"/>
+                          <a:cs typeface="Noto Sans JP" pitchFamily="34" charset="-120"/>
+                        </a:rPr>
+                        <a:t>総合コメント</a:t>
+                      </a:r>
+                      <a:endParaRPr lang="en-US" sz="1400" dirty="0">
+                        <a:latin typeface="Noto Sans JP" charset="0"/>
+                        <a:ea typeface="Noto Sans JP" charset="0"/>
+                        <a:cs typeface="Noto Sans JP" charset="0"/>
+                      </a:endParaRPr>
+                    </a:p>
+                  </a:txBody>
+                  <a:tcPr marL="91440" marR="91440" marT="45720" marB="45720" anchor="ctr">
+                    <a:lnL w="12700" cap="flat" cmpd="sng" algn="ctr">
+                      <a:solidFill>
+                        <a:srgbClr val="E5E7EB"/>
+                      </a:solidFill>
+                      <a:prstDash val="solid"/>
+                      <a:round/>
+                      <a:headEnd type="none" w="med" len="med"/>
+                      <a:tailEnd type="none" w="med" len="med"/>
+                    </a:lnL>
+                    <a:lnR w="12700" cap="flat" cmpd="sng" algn="ctr">
+                      <a:solidFill>
+                        <a:srgbClr val="E5E7EB"/>
+                      </a:solidFill>
+                      <a:prstDash val="solid"/>
+                      <a:round/>
+                      <a:headEnd type="none" w="med" len="med"/>
+                      <a:tailEnd type="none" w="med" len="med"/>
+                    </a:lnR>
+                    <a:lnT w="12700" cap="flat" cmpd="sng" algn="ctr">
+                      <a:solidFill>
+                        <a:srgbClr val="E5E7EB"/>
+                      </a:solidFill>
+                      <a:prstDash val="solid"/>
+                      <a:round/>
+                      <a:headEnd type="none" w="med" len="med"/>
+                      <a:tailEnd type="none" w="med" len="med"/>
+                    </a:lnT>
+                    <a:lnB w="12700" cap="flat" cmpd="sng" algn="ctr">
+                      <a:solidFill>
+                        <a:srgbClr val="E5E7EB"/>
+                      </a:solidFill>
+                      <a:prstDash val="solid"/>
+                      <a:round/>
+                      <a:headEnd type="none" w="med" len="med"/>
+                      <a:tailEnd type="none" w="med" len="med"/>
+                    </a:lnB>
+                    <a:solidFill>
+                      <a:srgbClr val="374151"/>
+                    </a:solidFill>
+                  </a:tcPr>
+                </a:tc>
+              </a:tr>
+              <a:tr h="2124075">
+                <a:tc>
+                  <a:txBody>
+                    <a:bodyPr/>
+                    <a:lstStyle/>
+                    <a:p>
+                      <a:pPr indent="0" marL="0">
+                        <a:buNone/>
+                      </a:pPr>
+                      <a:r>
+                        <a:rPr lang="en-US" sz="1100" dirty="0">
+                          <a:solidFill>
+                            <a:srgbClr val="111827"/>
+                          </a:solidFill>
+                          <a:latin typeface="Noto Sans JP" pitchFamily="34" charset="0"/>
+                          <a:ea typeface="Noto Sans JP" pitchFamily="34" charset="-122"/>
+                          <a:cs typeface="Noto Sans JP" pitchFamily="34" charset="-120"/>
+                        </a:rPr>
+                        <a:t>3</a:t>
+                      </a:r>
+                      <a:endParaRPr lang="en-US" sz="1100" dirty="0">
+                        <a:latin typeface="Noto Sans JP" charset="0"/>
+                        <a:ea typeface="Noto Sans JP" charset="0"/>
+                        <a:cs typeface="Noto Sans JP" charset="0"/>
+                      </a:endParaRPr>
+                    </a:p>
+                  </a:txBody>
+                  <a:tcPr marL="91440" marR="91440" marT="45720" marB="45720" anchor="ctr">
+                    <a:lnL w="12700" cap="flat" cmpd="sng" algn="ctr">
+                      <a:solidFill>
+                        <a:srgbClr val="E5E7EB"/>
+                      </a:solidFill>
+                      <a:prstDash val="solid"/>
+                      <a:round/>
+                      <a:headEnd type="none" w="med" len="med"/>
+                      <a:tailEnd type="none" w="med" len="med"/>
+                    </a:lnL>
+                    <a:lnR w="12700" cap="flat" cmpd="sng" algn="ctr">
+                      <a:solidFill>
+                        <a:srgbClr val="E5E7EB"/>
+                      </a:solidFill>
+                      <a:prstDash val="solid"/>
+                      <a:round/>
+                      <a:headEnd type="none" w="med" len="med"/>
+                      <a:tailEnd type="none" w="med" len="med"/>
+                    </a:lnR>
+                    <a:lnT w="12700" cap="flat" cmpd="sng" algn="ctr">
+                      <a:solidFill>
+                        <a:srgbClr val="E5E7EB"/>
+                      </a:solidFill>
+                      <a:prstDash val="solid"/>
+                      <a:round/>
+                      <a:headEnd type="none" w="med" len="med"/>
+                      <a:tailEnd type="none" w="med" len="med"/>
+                    </a:lnT>
+                    <a:lnB w="12700" cap="flat" cmpd="sng" algn="ctr">
+                      <a:solidFill>
+                        <a:srgbClr val="E5E7EB"/>
+                      </a:solidFill>
+                      <a:prstDash val="solid"/>
+                      <a:round/>
+                      <a:headEnd type="none" w="med" len="med"/>
+                      <a:tailEnd type="none" w="med" len="med"/>
+                    </a:lnB>
+                  </a:tcPr>
+                </a:tc>
+                <a:tc>
+                  <a:txBody>
+                    <a:bodyPr/>
+                    <a:lstStyle/>
+                    <a:p>
+                      <a:pPr indent="0" marL="0">
+                        <a:buNone/>
+                      </a:pPr>
+                      <a:r>
+                        <a:rPr lang="en-US" sz="1100" dirty="0">
+                          <a:solidFill>
+                            <a:srgbClr val="111827"/>
+                          </a:solidFill>
+                          <a:latin typeface="Noto Sans JP" pitchFamily="34" charset="0"/>
+                          <a:ea typeface="Noto Sans JP" pitchFamily="34" charset="-122"/>
+                          <a:cs typeface="Noto Sans JP" pitchFamily="34" charset="-120"/>
+                        </a:rPr>
+                        <a:t>ビジネス書・自己啓発の要約</a:t>
+                      </a:r>
+                      <a:endParaRPr lang="en-US" sz="1100" dirty="0">
+                        <a:latin typeface="Noto Sans JP" charset="0"/>
+                        <a:ea typeface="Noto Sans JP" charset="0"/>
+                        <a:cs typeface="Noto Sans JP" charset="0"/>
+                      </a:endParaRPr>
+                    </a:p>
+                  </a:txBody>
+                  <a:tcPr marL="91440" marR="91440" marT="45720" marB="45720" anchor="ctr">
+                    <a:lnL w="12700" cap="flat" cmpd="sng" algn="ctr">
+                      <a:solidFill>
+                        <a:srgbClr val="E5E7EB"/>
+                      </a:solidFill>
+                      <a:prstDash val="solid"/>
+                      <a:round/>
+                      <a:headEnd type="none" w="med" len="med"/>
+                      <a:tailEnd type="none" w="med" len="med"/>
+                    </a:lnL>
+                    <a:lnR w="12700" cap="flat" cmpd="sng" algn="ctr">
+                      <a:solidFill>
+                        <a:srgbClr val="E5E7EB"/>
+                      </a:solidFill>
+                      <a:prstDash val="solid"/>
+                      <a:round/>
+                      <a:headEnd type="none" w="med" len="med"/>
+                      <a:tailEnd type="none" w="med" len="med"/>
+                    </a:lnR>
+                    <a:lnT w="12700" cap="flat" cmpd="sng" algn="ctr">
+                      <a:solidFill>
+                        <a:srgbClr val="E5E7EB"/>
+                      </a:solidFill>
+                      <a:prstDash val="solid"/>
+                      <a:round/>
+                      <a:headEnd type="none" w="med" len="med"/>
+                      <a:tailEnd type="none" w="med" len="med"/>
+                    </a:lnT>
+                    <a:lnB w="12700" cap="flat" cmpd="sng" algn="ctr">
+                      <a:solidFill>
+                        <a:srgbClr val="E5E7EB"/>
+                      </a:solidFill>
+                      <a:prstDash val="solid"/>
+                      <a:round/>
+                      <a:headEnd type="none" w="med" len="med"/>
+                      <a:tailEnd type="none" w="med" len="med"/>
+                    </a:lnB>
+                  </a:tcPr>
+                </a:tc>
+                <a:tc>
+                  <a:txBody>
+                    <a:bodyPr/>
+                    <a:lstStyle/>
+                    <a:p>
+                      <a:pPr indent="0" marL="0">
+                        <a:buNone/>
+                      </a:pPr>
+                      <a:r>
+                        <a:rPr lang="en-US" sz="1100" dirty="0">
+                          <a:solidFill>
+                            <a:srgbClr val="111827"/>
+                          </a:solidFill>
+                          <a:latin typeface="Noto Sans JP" pitchFamily="34" charset="0"/>
+                          <a:ea typeface="Noto Sans JP" pitchFamily="34" charset="-122"/>
+                          <a:cs typeface="Noto Sans JP" pitchFamily="34" charset="-120"/>
+                        </a:rPr>
+                        <a:t>5/5</a:t>
+                      </a:r>
+                      <a:endParaRPr lang="en-US" sz="1100" dirty="0">
+                        <a:latin typeface="Noto Sans JP" charset="0"/>
+                        <a:ea typeface="Noto Sans JP" charset="0"/>
+                        <a:cs typeface="Noto Sans JP" charset="0"/>
+                      </a:endParaRPr>
+                    </a:p>
+                  </a:txBody>
+                  <a:tcPr marL="91440" marR="91440" marT="45720" marB="45720" anchor="ctr">
+                    <a:lnL w="12700" cap="flat" cmpd="sng" algn="ctr">
+                      <a:solidFill>
+                        <a:srgbClr val="E5E7EB"/>
+                      </a:solidFill>
+                      <a:prstDash val="solid"/>
+                      <a:round/>
+                      <a:headEnd type="none" w="med" len="med"/>
+                      <a:tailEnd type="none" w="med" len="med"/>
+                    </a:lnL>
+                    <a:lnR w="12700" cap="flat" cmpd="sng" algn="ctr">
+                      <a:solidFill>
+                        <a:srgbClr val="E5E7EB"/>
+                      </a:solidFill>
+                      <a:prstDash val="solid"/>
+                      <a:round/>
+                      <a:headEnd type="none" w="med" len="med"/>
+                      <a:tailEnd type="none" w="med" len="med"/>
+                    </a:lnR>
+                    <a:lnT w="12700" cap="flat" cmpd="sng" algn="ctr">
+                      <a:solidFill>
+                        <a:srgbClr val="E5E7EB"/>
+                      </a:solidFill>
+                      <a:prstDash val="solid"/>
+                      <a:round/>
+                      <a:headEnd type="none" w="med" len="med"/>
+                      <a:tailEnd type="none" w="med" len="med"/>
+                    </a:lnT>
+                    <a:lnB w="12700" cap="flat" cmpd="sng" algn="ctr">
+                      <a:solidFill>
+                        <a:srgbClr val="E5E7EB"/>
+                      </a:solidFill>
+                      <a:prstDash val="solid"/>
+                      <a:round/>
+                      <a:headEnd type="none" w="med" len="med"/>
+                      <a:tailEnd type="none" w="med" len="med"/>
+                    </a:lnB>
+                  </a:tcPr>
+                </a:tc>
+                <a:tc>
+                  <a:txBody>
+                    <a:bodyPr/>
+                    <a:lstStyle/>
+                    <a:p>
+                      <a:pPr indent="0" marL="0">
+                        <a:buNone/>
+                      </a:pPr>
+                      <a:r>
+                        <a:rPr lang="en-US" sz="1100" dirty="0">
+                          <a:solidFill>
+                            <a:srgbClr val="111827"/>
+                          </a:solidFill>
+                          <a:latin typeface="Noto Sans JP" pitchFamily="34" charset="0"/>
+                          <a:ea typeface="Noto Sans JP" pitchFamily="34" charset="-122"/>
+                          <a:cs typeface="Noto Sans JP" pitchFamily="34" charset="-120"/>
+                        </a:rPr>
+                        <a:t>1/5</a:t>
+                      </a:r>
+                      <a:endParaRPr lang="en-US" sz="1100" dirty="0">
+                        <a:latin typeface="Noto Sans JP" charset="0"/>
+                        <a:ea typeface="Noto Sans JP" charset="0"/>
+                        <a:cs typeface="Noto Sans JP" charset="0"/>
+                      </a:endParaRPr>
+                    </a:p>
+                  </a:txBody>
+                  <a:tcPr marL="91440" marR="91440" marT="45720" marB="45720" anchor="ctr">
+                    <a:lnL w="12700" cap="flat" cmpd="sng" algn="ctr">
+                      <a:solidFill>
+                        <a:srgbClr val="E5E7EB"/>
+                      </a:solidFill>
+                      <a:prstDash val="solid"/>
+                      <a:round/>
+                      <a:headEnd type="none" w="med" len="med"/>
+                      <a:tailEnd type="none" w="med" len="med"/>
+                    </a:lnL>
+                    <a:lnR w="12700" cap="flat" cmpd="sng" algn="ctr">
+                      <a:solidFill>
+                        <a:srgbClr val="E5E7EB"/>
+                      </a:solidFill>
+                      <a:prstDash val="solid"/>
+                      <a:round/>
+                      <a:headEnd type="none" w="med" len="med"/>
+                      <a:tailEnd type="none" w="med" len="med"/>
+                    </a:lnR>
+                    <a:lnT w="12700" cap="flat" cmpd="sng" algn="ctr">
+                      <a:solidFill>
+                        <a:srgbClr val="E5E7EB"/>
+                      </a:solidFill>
+                      <a:prstDash val="solid"/>
+                      <a:round/>
+                      <a:headEnd type="none" w="med" len="med"/>
+                      <a:tailEnd type="none" w="med" len="med"/>
+                    </a:lnT>
+                    <a:lnB w="12700" cap="flat" cmpd="sng" algn="ctr">
+                      <a:solidFill>
+                        <a:srgbClr val="E5E7EB"/>
+                      </a:solidFill>
+                      <a:prstDash val="solid"/>
+                      <a:round/>
+                      <a:headEnd type="none" w="med" len="med"/>
+                      <a:tailEnd type="none" w="med" len="med"/>
+                    </a:lnB>
+                  </a:tcPr>
+                </a:tc>
+                <a:tc>
+                  <a:txBody>
+                    <a:bodyPr/>
+                    <a:lstStyle/>
+                    <a:p>
+                      <a:pPr indent="0" marL="0">
+                        <a:buNone/>
+                      </a:pPr>
+                      <a:r>
+                        <a:rPr lang="en-US" sz="1100" dirty="0">
+                          <a:solidFill>
+                            <a:srgbClr val="111827"/>
+                          </a:solidFill>
+                          <a:latin typeface="Noto Sans JP" pitchFamily="34" charset="0"/>
+                          <a:ea typeface="Noto Sans JP" pitchFamily="34" charset="-122"/>
+                          <a:cs typeface="Noto Sans JP" pitchFamily="34" charset="-120"/>
+                        </a:rPr>
+                        <a:t>適性あり</a:t>
+                      </a:r>
+                      <a:endParaRPr lang="en-US" sz="1100" dirty="0">
+                        <a:latin typeface="Noto Sans JP" charset="0"/>
+                        <a:ea typeface="Noto Sans JP" charset="0"/>
+                        <a:cs typeface="Noto Sans JP" charset="0"/>
+                      </a:endParaRPr>
+                    </a:p>
+                  </a:txBody>
+                  <a:tcPr marL="91440" marR="91440" marT="45720" marB="45720" anchor="ctr">
+                    <a:lnL w="12700" cap="flat" cmpd="sng" algn="ctr">
+                      <a:solidFill>
+                        <a:srgbClr val="E5E7EB"/>
+                      </a:solidFill>
+                      <a:prstDash val="solid"/>
+                      <a:round/>
+                      <a:headEnd type="none" w="med" len="med"/>
+                      <a:tailEnd type="none" w="med" len="med"/>
+                    </a:lnL>
+                    <a:lnR w="12700" cap="flat" cmpd="sng" algn="ctr">
+                      <a:solidFill>
+                        <a:srgbClr val="E5E7EB"/>
+                      </a:solidFill>
+                      <a:prstDash val="solid"/>
+                      <a:round/>
+                      <a:headEnd type="none" w="med" len="med"/>
+                      <a:tailEnd type="none" w="med" len="med"/>
+                    </a:lnR>
+                    <a:lnT w="12700" cap="flat" cmpd="sng" algn="ctr">
+                      <a:solidFill>
+                        <a:srgbClr val="E5E7EB"/>
+                      </a:solidFill>
+                      <a:prstDash val="solid"/>
+                      <a:round/>
+                      <a:headEnd type="none" w="med" len="med"/>
+                      <a:tailEnd type="none" w="med" len="med"/>
+                    </a:lnT>
+                    <a:lnB w="12700" cap="flat" cmpd="sng" algn="ctr">
+                      <a:solidFill>
+                        <a:srgbClr val="E5E7EB"/>
+                      </a:solidFill>
+                      <a:prstDash val="solid"/>
+                      <a:round/>
+                      <a:headEnd type="none" w="med" len="med"/>
+                      <a:tailEnd type="none" w="med" len="med"/>
+                    </a:lnB>
+                  </a:tcPr>
+                </a:tc>
+                <a:tc>
+                  <a:txBody>
+                    <a:bodyPr/>
+                    <a:lstStyle/>
+                    <a:p>
+                      <a:pPr indent="0" marL="0">
+                        <a:buNone/>
+                      </a:pPr>
+                      <a:r>
+                        <a:rPr lang="en-US" sz="1100" dirty="0">
+                          <a:solidFill>
+                            <a:srgbClr val="111827"/>
+                          </a:solidFill>
+                          <a:latin typeface="Noto Sans JP" pitchFamily="34" charset="0"/>
+                          <a:ea typeface="Noto Sans JP" pitchFamily="34" charset="-122"/>
+                          <a:cs typeface="Noto Sans JP" pitchFamily="34" charset="-120"/>
+                        </a:rPr>
+                        <a:t>本要約チャンネル（167万人）、中田敦彦のYouTube大学（300万人以上）など大手が既に市場を確立しており、視聴者需要自体は根強い（5点）。一方、2025年以降に新規開設されたチャンネルの急成長事例は調査範囲内で「見当たらない」と明確に報告されており、既存大手中心の飽和市場であるため短期急成長ポテンシャルは1点。自動生成適性自体は技術的に高い（VYOND・VOICEPEAK・VOICEVOX等のツールで本要約チャンネルは毎日投稿を実現）が、書籍要約は著作権法上「翻案権」に触れるグレーゾーンであり、他2ジャンルにはない固有の法的リスクを抱える点が実運用上のマイナス要因。</a:t>
+                      </a:r>
+                      <a:endParaRPr lang="en-US" sz="1100" dirty="0">
+                        <a:latin typeface="Noto Sans JP" charset="0"/>
+                        <a:ea typeface="Noto Sans JP" charset="0"/>
+                        <a:cs typeface="Noto Sans JP" charset="0"/>
+                      </a:endParaRPr>
+                    </a:p>
+                  </a:txBody>
+                  <a:tcPr marL="91440" marR="91440" marT="45720" marB="45720" anchor="ctr">
+                    <a:lnL w="12700" cap="flat" cmpd="sng" algn="ctr">
+                      <a:solidFill>
+                        <a:srgbClr val="E5E7EB"/>
+                      </a:solidFill>
+                      <a:prstDash val="solid"/>
+                      <a:round/>
+                      <a:headEnd type="none" w="med" len="med"/>
+                      <a:tailEnd type="none" w="med" len="med"/>
+                    </a:lnL>
+                    <a:lnR w="12700" cap="flat" cmpd="sng" algn="ctr">
+                      <a:solidFill>
+                        <a:srgbClr val="E5E7EB"/>
+                      </a:solidFill>
+                      <a:prstDash val="solid"/>
+                      <a:round/>
+                      <a:headEnd type="none" w="med" len="med"/>
+                      <a:tailEnd type="none" w="med" len="med"/>
+                    </a:lnR>
+                    <a:lnT w="12700" cap="flat" cmpd="sng" algn="ctr">
+                      <a:solidFill>
+                        <a:srgbClr val="E5E7EB"/>
+                      </a:solidFill>
+                      <a:prstDash val="solid"/>
+                      <a:round/>
+                      <a:headEnd type="none" w="med" len="med"/>
+                      <a:tailEnd type="none" w="med" len="med"/>
+                    </a:lnT>
+                    <a:lnB w="12700" cap="flat" cmpd="sng" algn="ctr">
+                      <a:solidFill>
+                        <a:srgbClr val="E5E7EB"/>
+                      </a:solidFill>
+                      <a:prstDash val="solid"/>
+                      <a:round/>
+                      <a:headEnd type="none" w="med" len="med"/>
+                      <a:tailEnd type="none" w="med" len="med"/>
+                    </a:lnB>
+                  </a:tcPr>
+                </a:tc>
+              </a:tr>
+            </a:tbl>
+          </a:graphicData>
+        </a:graphic>
+      </p:graphicFrame>
+    </p:spTree>
+  </p:cSld>
+  <p:clrMapOvr>
+    <a:masterClrMapping/>
+  </p:clrMapOvr>
+</p:sld>
+</file>
+
+<file path=ppt/slides/slide7.xml><?xml version="1.0" encoding="utf-8"?>
+<p:sld xmlns:a="http://schemas.openxmlformats.org/drawingml/2006/main" xmlns:r="http://schemas.openxmlformats.org/officeDocument/2006/relationships" xmlns:p="http://schemas.openxmlformats.org/presentationml/2006/main">
+  <p:cSld name="Slide 7">
     <p:spTree>
       <p:nvGrpSpPr>
         <p:cNvPr id="1" name=""/>
@@ -4528,9 +4720,9 @@
 </p:sld>
 </file>
 
-<file path=ppt/slides/slide7.xml><?xml version="1.0" encoding="utf-8"?>
+<file path=ppt/slides/slide8.xml><?xml version="1.0" encoding="utf-8"?>
 <p:sld xmlns:a="http://schemas.openxmlformats.org/drawingml/2006/main" xmlns:r="http://schemas.openxmlformats.org/officeDocument/2006/relationships" xmlns:p="http://schemas.openxmlformats.org/presentationml/2006/main">
-  <p:cSld name="Slide 7">
+  <p:cSld name="Slide 8">
     <p:spTree>
       <p:nvGrpSpPr>
         <p:cNvPr id="1" name=""/>
@@ -4716,9 +4908,9 @@
 </p:sld>
 </file>
 
-<file path=ppt/slides/slide8.xml><?xml version="1.0" encoding="utf-8"?>
+<file path=ppt/slides/slide9.xml><?xml version="1.0" encoding="utf-8"?>
 <p:sld xmlns:a="http://schemas.openxmlformats.org/drawingml/2006/main" xmlns:r="http://schemas.openxmlformats.org/officeDocument/2006/relationships" xmlns:p="http://schemas.openxmlformats.org/presentationml/2006/main">
-  <p:cSld name="Slide 8">
+  <p:cSld name="Slide 9">
     <p:spTree>
       <p:nvGrpSpPr>
         <p:cNvPr id="1" name=""/>
